--- a/Lectures/week08/week08.pptx
+++ b/Lectures/week08/week08.pptx
@@ -22,6 +22,9 @@
     <p:sldId id="270" r:id="rId22"/>
     <p:sldId id="271" r:id="rId23"/>
     <p:sldId id="272" r:id="rId24"/>
+    <p:sldId id="273" r:id="rId25"/>
+    <p:sldId id="274" r:id="rId26"/>
+    <p:sldId id="275" r:id="rId27"/>
   </p:sldIdLst>
   <p:sldSz cx="12191695" cy="6858000" type="screen4x3"/>
   <p:notesSz cx="6858000" cy="9144000"/>
@@ -648,79 +651,90 @@
           <a:lstStyle/>
           <a:p>
             <a:r>
-              <a:t>Four grades. Keep it this simple, because a complicated rubric doesn't get used.</a:t>
+              <a:t>Here's a real test set, so you can see the shape rather than the description.</a:t>
             </a:r>
           </a:p>
           <a:p/>
           <a:p>
             <a:r>
-              <a:t>CORRECT — right answer, and the quotation genuinely supports it. Both halves required.</a:t>
+              <a:t>Sources: a clinical guideline extract and a departmental protocol.</a:t>
             </a:r>
           </a:p>
           <a:p/>
           <a:p>
             <a:r>
-              <a:t>UNSUPPORTED — plausible answer, but no quotation, or a quotation that doesn't actually support</a:t>
-            </a:r>
-          </a:p>
-          <a:p>
-            <a:r>
-              <a:t>the claim. Note that an answer can be *true* and still graded UNSUPPORTED, because you're</a:t>
-            </a:r>
-          </a:p>
-          <a:p>
-            <a:r>
-              <a:t>testing the system's process, not its luck.</a:t>
+              <a:t>Two of the seven answerable questions. First, what monitoring interval is stated for the first</a:t>
+            </a:r>
+          </a:p>
+          <a:p>
+            <a:r>
+              <a:t>forty-eight hours — stated plainly in one place, so this is an easy one, checking that the</a:t>
+            </a:r>
+          </a:p>
+          <a:p>
+            <a:r>
+              <a:t>machinery works at all.</a:t>
             </a:r>
           </a:p>
           <a:p/>
           <a:p>
             <a:r>
-              <a:t>WRONG — the answer contradicts the source.</a:t>
+              <a:t>Second, which patients are excluded from the standard pathway. Phrased in the source as an</a:t>
+            </a:r>
+          </a:p>
+          <a:p>
+            <a:r>
+              <a:t>exception, which makes it harder, because retrieval finds the general rule more readily than the</a:t>
+            </a:r>
+          </a:p>
+          <a:p>
+            <a:r>
+              <a:t>carve-out. Exceptions are excellent test questions for exactly this reason: a system that</a:t>
+            </a:r>
+          </a:p>
+          <a:p>
+            <a:r>
+              <a:t>retrieves the rule and misses the exception gives you a confident answer that is wrong precisely</a:t>
+            </a:r>
+          </a:p>
+          <a:p>
+            <a:r>
+              <a:t>in the cases where it matters.</a:t>
             </a:r>
           </a:p>
           <a:p/>
           <a:p>
             <a:r>
-              <a:t>REFUSED — said NOT IN SOURCES.</a:t>
+              <a:t>Now the three unanswerable ones, and notice how they're constructed.</a:t>
             </a:r>
           </a:p>
           <a:p/>
           <a:p>
             <a:r>
-              <a:t>Now the bold part: read the pattern, not the score. Nobody cares that you got seven out of ten.</a:t>
-            </a:r>
-          </a:p>
-          <a:p>
-            <a:r>
-              <a:t>What matters is *which* ones and *how*.</a:t>
+              <a:t>Paediatric patients — the extract covers adults only. A different population.</a:t>
             </a:r>
           </a:p>
           <a:p/>
           <a:p>
             <a:r>
-              <a:t>REFUSED on all three unanswerable questions is the result you want. That's a well-behaved</a:t>
-            </a:r>
-          </a:p>
-          <a:p>
-            <a:r>
-              <a:t>system and you can use it with reasonable confidence.</a:t>
+              <a:t>The 2027 update — a later version we don't hold. A different time.</a:t>
             </a:r>
           </a:p>
           <a:p/>
           <a:p>
             <a:r>
-              <a:t>UNSUPPORTED on any of the three unanswerable questions is your headline finding. Write it down</a:t>
-            </a:r>
-          </a:p>
-          <a:p>
-            <a:r>
-              <a:t>in words: "when it doesn't know, it answers anyway." That single sentence should change how</a:t>
-            </a:r>
-          </a:p>
-          <a:p>
-            <a:r>
-              <a:t>you use the system permanently.</a:t>
+              <a:t>The German guideline — an adjacent source we never loaded. A different jurisdiction.</a:t>
+            </a:r>
+          </a:p>
+          <a:p/>
+          <a:p>
+            <a:r>
+              <a:t>Population, time, jurisdiction. Those three axes will generate plausible unanswerable questions</a:t>
+            </a:r>
+          </a:p>
+          <a:p>
+            <a:r>
+              <a:t>in any field. Steal that pattern.</a:t>
             </a:r>
           </a:p>
         </p:txBody>
@@ -790,88 +804,72 @@
           <a:lstStyle/>
           <a:p>
             <a:r>
-              <a:t>The most common informal verification method, and it doesn't work.</a:t>
+              <a:t>Writing the unanswerable questions is the skill, so let me be precise about it.</a:t>
             </a:r>
           </a:p>
           <a:p/>
           <a:p>
             <a:r>
-              <a:t>The pattern: you get an answer, you feel unsure, you ask again, you get something similar, and</a:t>
-            </a:r>
-          </a:p>
-          <a:p>
-            <a:r>
-              <a:t>you feel reassured. Everyone does this. It feels like checking.</a:t>
+              <a:t>Good: "what does it say about paediatric patients?" A colleague would genuinely ask this. The</a:t>
+            </a:r>
+          </a:p>
+          <a:p>
+            <a:r>
+              <a:t>topic is adjacent to what the source covers. And crucially — the system has just enough related</a:t>
+            </a:r>
+          </a:p>
+          <a:p>
+            <a:r>
+              <a:t>material to be tempted. That's the condition you're trying to create.</a:t>
             </a:r>
           </a:p>
           <a:p/>
           <a:p>
             <a:r>
-              <a:t>What consistency actually measures is how strongly a pattern is represented in the training</a:t>
-            </a:r>
-          </a:p>
-          <a:p>
-            <a:r>
-              <a:t>data. Not whether it's true. And the crucial consequence: a widely repeated error is reproduced</a:t>
-            </a:r>
-          </a:p>
-          <a:p>
-            <a:r>
-              <a:t>very consistently indeed. Common misconceptions are, by definition, common in text. So the</a:t>
-            </a:r>
-          </a:p>
-          <a:p>
-            <a:r>
-              <a:t>things you're most likely to get wrong are the things that will come back most consistently.</a:t>
+              <a:t>Bad, too absurd: asking a clinical guideline about football. It will refuse, obviously, you'll</a:t>
+            </a:r>
+          </a:p>
+          <a:p>
+            <a:r>
+              <a:t>learn nothing, and — this is the real damage — you'll conclude that your system is well behaved</a:t>
+            </a:r>
+          </a:p>
+          <a:p>
+            <a:r>
+              <a:t>when you haven't tested it at all. A false pass is worse than no test.</a:t>
             </a:r>
           </a:p>
           <a:p/>
           <a:p>
             <a:r>
-              <a:t>Consistency is, if anything, weak evidence in the wrong direction for exactly the errors that</a:t>
-            </a:r>
-          </a:p>
-          <a:p>
-            <a:r>
-              <a:t>matter.</a:t>
+              <a:t>Bad, actually answerable: a question you assumed was uncovered but which the source addresses</a:t>
+            </a:r>
+          </a:p>
+          <a:p>
+            <a:r>
+              <a:t>obliquely, perhaps in a footnote or a table. Now you record a failure that isn't one, and you</a:t>
+            </a:r>
+          </a:p>
+          <a:p>
+            <a:r>
+              <a:t>distrust a system that was working.</a:t>
             </a:r>
           </a:p>
           <a:p/>
           <a:p>
             <a:r>
-              <a:t>What does work: check against a source. Check against something you already know. Ask for the</a:t>
-            </a:r>
-          </a:p>
-          <a:p>
-            <a:r>
-              <a:t>quotation and look it up. All of those compare the answer against something outside the system.</a:t>
+              <a:t>So: check your sources properly before deciding a question is unanswerable. It takes two minutes</a:t>
+            </a:r>
+          </a:p>
+          <a:p>
+            <a:r>
+              <a:t>and it's the difference between a finding and a mistake.</a:t>
             </a:r>
           </a:p>
           <a:p/>
           <a:p>
             <a:r>
-              <a:t>Asking a different model is slightly better than asking the same one twice, because the errors</a:t>
-            </a:r>
-          </a:p>
-          <a:p>
-            <a:r>
-              <a:t>may differ. But they're trained on overlapping material, so a widespread misconception may</a:t>
-            </a:r>
-          </a:p>
-          <a:p>
-            <a:r>
-              <a:t>appear in both. Better than nothing; not proof.</a:t>
-            </a:r>
-          </a:p>
-          <a:p/>
-          <a:p>
-            <a:r>
-              <a:t>The general principle: verification requires something outside the system. Another opinion from</a:t>
-            </a:r>
-          </a:p>
-          <a:p>
-            <a:r>
-              <a:t>inside it isn't independent.</a:t>
+              <a:t>The general rule — aim for adjacent, not absent. Adjacent is where the temptation lives.</a:t>
             </a:r>
           </a:p>
         </p:txBody>
@@ -941,7 +939,79 @@
           <a:lstStyle/>
           <a:p>
             <a:r>
-              <a:t>Part three. Twenty minutes. This one is uncomfortable by design.</a:t>
+              <a:t>Four grades. Keep it this simple, because a complicated rubric doesn't get used.</a:t>
+            </a:r>
+          </a:p>
+          <a:p/>
+          <a:p>
+            <a:r>
+              <a:t>CORRECT — right answer, and the quotation genuinely supports it. Both halves required.</a:t>
+            </a:r>
+          </a:p>
+          <a:p/>
+          <a:p>
+            <a:r>
+              <a:t>UNSUPPORTED — plausible answer, but no quotation, or a quotation that doesn't actually support</a:t>
+            </a:r>
+          </a:p>
+          <a:p>
+            <a:r>
+              <a:t>the claim. Note that an answer can be *true* and still graded UNSUPPORTED, because you're</a:t>
+            </a:r>
+          </a:p>
+          <a:p>
+            <a:r>
+              <a:t>testing the system's process, not its luck.</a:t>
+            </a:r>
+          </a:p>
+          <a:p/>
+          <a:p>
+            <a:r>
+              <a:t>WRONG — the answer contradicts the source.</a:t>
+            </a:r>
+          </a:p>
+          <a:p/>
+          <a:p>
+            <a:r>
+              <a:t>REFUSED — said NOT IN SOURCES.</a:t>
+            </a:r>
+          </a:p>
+          <a:p/>
+          <a:p>
+            <a:r>
+              <a:t>Now the bold part: read the pattern, not the score. Nobody cares that you got seven out of ten.</a:t>
+            </a:r>
+          </a:p>
+          <a:p>
+            <a:r>
+              <a:t>What matters is *which* ones and *how*.</a:t>
+            </a:r>
+          </a:p>
+          <a:p/>
+          <a:p>
+            <a:r>
+              <a:t>REFUSED on all three unanswerable questions is the result you want. That's a well-behaved</a:t>
+            </a:r>
+          </a:p>
+          <a:p>
+            <a:r>
+              <a:t>system and you can use it with reasonable confidence.</a:t>
+            </a:r>
+          </a:p>
+          <a:p/>
+          <a:p>
+            <a:r>
+              <a:t>UNSUPPORTED on any of the three unanswerable questions is your headline finding. Write it down</a:t>
+            </a:r>
+          </a:p>
+          <a:p>
+            <a:r>
+              <a:t>in words: "when it doesn't know, it answers anyway." That single sentence should change how</a:t>
+            </a:r>
+          </a:p>
+          <a:p>
+            <a:r>
+              <a:t>you use the system permanently.</a:t>
             </a:r>
           </a:p>
         </p:txBody>
@@ -1011,83 +1081,88 @@
           <a:lstStyle/>
           <a:p>
             <a:r>
-              <a:t>Twenty minutes. Four steps.</a:t>
+              <a:t>The most common informal verification method, and it doesn't work.</a:t>
             </a:r>
           </a:p>
           <a:p/>
           <a:p>
             <a:r>
-              <a:t>One. Seven questions your sources answer — two easy, three medium, two hard. And write the</a:t>
-            </a:r>
-          </a:p>
-          <a:p>
-            <a:r>
-              <a:t>expected answer next to each one *before* you run anything. I'll keep saying this because it's</a:t>
-            </a:r>
-          </a:p>
-          <a:p>
-            <a:r>
-              <a:t>the step everyone skips and it's the step that makes the exercise honest.</a:t>
+              <a:t>The pattern: you get an answer, you feel unsure, you ask again, you get something similar, and</a:t>
+            </a:r>
+          </a:p>
+          <a:p>
+            <a:r>
+              <a:t>you feel reassured. Everyone does this. It feels like checking.</a:t>
             </a:r>
           </a:p>
           <a:p/>
           <a:p>
             <a:r>
-              <a:t>Two. Three plausible questions your sources cannot answer. Adjacent topic, different</a:t>
-            </a:r>
-          </a:p>
-          <a:p>
-            <a:r>
-              <a:t>jurisdiction, a later year. Realistic, not absurd.</a:t>
+              <a:t>What consistency actually measures is how strongly a pattern is represented in the training</a:t>
+            </a:r>
+          </a:p>
+          <a:p>
+            <a:r>
+              <a:t>data. Not whether it's true. And the crucial consequence: a widely repeated error is reproduced</a:t>
+            </a:r>
+          </a:p>
+          <a:p>
+            <a:r>
+              <a:t>very consistently indeed. Common misconceptions are, by definition, common in text. So the</a:t>
+            </a:r>
+          </a:p>
+          <a:p>
+            <a:r>
+              <a:t>things you're most likely to get wrong are the things that will come back most consistently.</a:t>
             </a:r>
           </a:p>
           <a:p/>
           <a:p>
             <a:r>
-              <a:t>Three. Run all ten against your week seven assistant. If you don't have one — if you weren't</a:t>
-            </a:r>
-          </a:p>
-          <a:p>
-            <a:r>
-              <a:t>here, or it didn't work — use mine, it's on the board with its source pack.</a:t>
+              <a:t>Consistency is, if anything, weak evidence in the wrong direction for exactly the errors that</a:t>
+            </a:r>
+          </a:p>
+          <a:p>
+            <a:r>
+              <a:t>matter.</a:t>
             </a:r>
           </a:p>
           <a:p/>
           <a:p>
             <a:r>
-              <a:t>Four. Grade each one, and then write a single sentence describing how this system behaves when</a:t>
-            </a:r>
-          </a:p>
-          <a:p>
-            <a:r>
-              <a:t>it doesn't know.</a:t>
+              <a:t>What does work: check against a source. Check against something you already know. Ask for the</a:t>
+            </a:r>
+          </a:p>
+          <a:p>
+            <a:r>
+              <a:t>quotation and look it up. All of those compare the answer against something outside the system.</a:t>
             </a:r>
           </a:p>
           <a:p/>
           <a:p>
             <a:r>
-              <a:t>That sentence is what you take away. Not the assistant. Not the score. The sentence.</a:t>
+              <a:t>Asking a different model is slightly better than asking the same one twice, because the errors</a:t>
+            </a:r>
+          </a:p>
+          <a:p>
+            <a:r>
+              <a:t>may differ. But they're trained on overlapping material, so a widespread misconception may</a:t>
+            </a:r>
+          </a:p>
+          <a:p>
+            <a:r>
+              <a:t>appear in both. Better than nothing; not proof.</a:t>
             </a:r>
           </a:p>
           <a:p/>
           <a:p>
             <a:r>
-              <a:t>[Circulate. Watch for: unanswerable questions that are too absurd — push them to make them</a:t>
-            </a:r>
-          </a:p>
-          <a:p>
-            <a:r>
-              <a:t>plausible; and people grading generously. Ask "did you look up that quote?" If nobody is</a:t>
-            </a:r>
-          </a:p>
-          <a:p>
-            <a:r>
-              <a:t>building, run the provided test set on the provided assistant on screen — the three</a:t>
-            </a:r>
-          </a:p>
-          <a:p>
-            <a:r>
-              <a:t>unanswerable ones are the demonstration.]</a:t>
+              <a:t>The general principle: verification requires something outside the system. Another opinion from</a:t>
+            </a:r>
+          </a:p>
+          <a:p>
+            <a:r>
+              <a:t>inside it isn't independent.</a:t>
             </a:r>
           </a:p>
         </p:txBody>
@@ -1157,81 +1232,7 @@
           <a:lstStyle/>
           <a:p>
             <a:r>
-              <a:t>What almost always happens — and this holds whether or not you ran it yourself.</a:t>
-            </a:r>
-          </a:p>
-          <a:p/>
-          <a:p>
-            <a:r>
-              <a:t>It answers at least one unanswerable question. Usually with something reasonable-sounding</a:t>
-            </a:r>
-          </a:p>
-          <a:p>
-            <a:r>
-              <a:t>drawn from general knowledge, sometimes with a hedge attached, occasionally with a citation</a:t>
-            </a:r>
-          </a:p>
-          <a:p>
-            <a:r>
-              <a:t>that doesn't exist. That is week three's mechanism, on a system you built, in front of you. If</a:t>
-            </a:r>
-          </a:p>
-          <a:p>
-            <a:r>
-              <a:t>that happened to you in the last twenty minutes, that's the most valuable thing that will</a:t>
-            </a:r>
-          </a:p>
-          <a:p>
-            <a:r>
-              <a:t>happen to you in this course.</a:t>
-            </a:r>
-          </a:p>
-          <a:p/>
-          <a:p>
-            <a:r>
-              <a:t>The hard questions expose retrieval rather than reasoning. Failures cluster on answers spread</a:t>
-            </a:r>
-          </a:p>
-          <a:p>
-            <a:r>
-              <a:t>across sections, stated as exceptions, or held in tables. And the diagnosis matters: the model</a:t>
-            </a:r>
-          </a:p>
-          <a:p>
-            <a:r>
-              <a:t>didn't reason badly. It never saw the right passage. Those need completely different fixes —</a:t>
-            </a:r>
-          </a:p>
-          <a:p>
-            <a:r>
-              <a:t>one is a prompting problem, the other is a document-structure problem, and you'd waste a lot of</a:t>
-            </a:r>
-          </a:p>
-          <a:p>
-            <a:r>
-              <a:t>time treating one as the other.</a:t>
-            </a:r>
-          </a:p>
-          <a:p/>
-          <a:p>
-            <a:r>
-              <a:t>And over-reading is the most common wrong answer. The claim is stronger than the sentence</a:t>
-            </a:r>
-          </a:p>
-          <a:p>
-            <a:r>
-              <a:t>supports. "May" becomes "must." A specific case becomes a general rule.</a:t>
-            </a:r>
-          </a:p>
-          <a:p/>
-          <a:p>
-            <a:r>
-              <a:t>Go back and check yours for that specifically. It's easy to miss because the answer isn't</a:t>
-            </a:r>
-          </a:p>
-          <a:p>
-            <a:r>
-              <a:t>false, it's overstated.</a:t>
+              <a:t>Part three. Twenty minutes. This one is uncomfortable by design.</a:t>
             </a:r>
           </a:p>
         </p:txBody>
@@ -1301,72 +1302,83 @@
           <a:lstStyle/>
           <a:p>
             <a:r>
-              <a:t>What's examinable from today, and this week is heavily represented on both exams.</a:t>
+              <a:t>Twenty minutes. Four steps.</a:t>
             </a:r>
           </a:p>
           <a:p/>
           <a:p>
             <a:r>
-              <a:t>The verification gap, including the counterintuitive part: it widens as output quality rises.</a:t>
-            </a:r>
-          </a:p>
-          <a:p>
-            <a:r>
-              <a:t>Expect to be asked why better models make checking harder.</a:t>
+              <a:t>One. Seven questions your sources answer — two easy, three medium, two hard. And write the</a:t>
+            </a:r>
+          </a:p>
+          <a:p>
+            <a:r>
+              <a:t>expected answer next to each one *before* you run anything. I'll keep saying this because it's</a:t>
+            </a:r>
+          </a:p>
+          <a:p>
+            <a:r>
+              <a:t>the step everyone skips and it's the step that makes the exercise honest.</a:t>
             </a:r>
           </a:p>
           <a:p/>
           <a:p>
             <a:r>
-              <a:t>Test set structure. Seven answerable graded by difficulty, three plausible unanswerable ones,</a:t>
-            </a:r>
-          </a:p>
-          <a:p>
-            <a:r>
-              <a:t>expected answers written before running. I may give you a proposed test set and ask what's</a:t>
-            </a:r>
-          </a:p>
-          <a:p>
-            <a:r>
-              <a:t>wrong with it — usually the unanswerable questions are absurd rather than plausible, or the</a:t>
-            </a:r>
-          </a:p>
-          <a:p>
-            <a:r>
-              <a:t>questions are too vague to grade.</a:t>
+              <a:t>Two. Three plausible questions your sources cannot answer. Adjacent topic, different</a:t>
+            </a:r>
+          </a:p>
+          <a:p>
+            <a:r>
+              <a:t>jurisdiction, a later year. Realistic, not absurd.</a:t>
             </a:r>
           </a:p>
           <a:p/>
           <a:p>
             <a:r>
-              <a:t>Why the unanswerable ones matter most: they test behaviour in the situation you cannot detect</a:t>
-            </a:r>
-          </a:p>
-          <a:p>
-            <a:r>
-              <a:t>during normal use.</a:t>
+              <a:t>Three. Run all ten against your week seven assistant. If you don't have one — if you weren't</a:t>
+            </a:r>
+          </a:p>
+          <a:p>
+            <a:r>
+              <a:t>here, or it didn't work — use mine, it's on the board with its source pack.</a:t>
             </a:r>
           </a:p>
           <a:p/>
           <a:p>
             <a:r>
-              <a:t>The four grades, and reading the pattern rather than the score.</a:t>
+              <a:t>Four. Grade each one, and then write a single sentence describing how this system behaves when</a:t>
+            </a:r>
+          </a:p>
+          <a:p>
+            <a:r>
+              <a:t>it doesn't know.</a:t>
             </a:r>
           </a:p>
           <a:p/>
           <a:p>
             <a:r>
-              <a:t>And consistency is not correctness — with the reason. Repeating a question measures how common</a:t>
-            </a:r>
-          </a:p>
-          <a:p>
-            <a:r>
-              <a:t>a pattern is. Verification requires something outside the system. That is a near-certain exam</a:t>
-            </a:r>
-          </a:p>
-          <a:p>
-            <a:r>
-              <a:t>question.</a:t>
+              <a:t>That sentence is what you take away. Not the assistant. Not the score. The sentence.</a:t>
+            </a:r>
+          </a:p>
+          <a:p/>
+          <a:p>
+            <a:r>
+              <a:t>[Circulate. Watch for: unanswerable questions that are too absurd — push them to make them</a:t>
+            </a:r>
+          </a:p>
+          <a:p>
+            <a:r>
+              <a:t>plausible; and people grading generously. Ask "did you look up that quote?" If nobody is</a:t>
+            </a:r>
+          </a:p>
+          <a:p>
+            <a:r>
+              <a:t>building, run the provided test set on the provided assistant on screen — the three</a:t>
+            </a:r>
+          </a:p>
+          <a:p>
+            <a:r>
+              <a:t>unanswerable ones are the demonstration.]</a:t>
             </a:r>
           </a:p>
         </p:txBody>
@@ -1436,75 +1448,81 @@
           <a:lstStyle/>
           <a:p>
             <a:r>
-              <a:t>Five things.</a:t>
+              <a:t>What almost always happens — and this holds whether or not you ran it yourself.</a:t>
             </a:r>
           </a:p>
           <a:p/>
           <a:p>
             <a:r>
-              <a:t>Generating is fast, checking is slow, and the gap grows as quality rises. Which is why this</a:t>
-            </a:r>
-          </a:p>
-          <a:p>
-            <a:r>
-              <a:t>skill matters more over time, not less.</a:t>
+              <a:t>It answers at least one unanswerable question. Usually with something reasonable-sounding</a:t>
+            </a:r>
+          </a:p>
+          <a:p>
+            <a:r>
+              <a:t>drawn from general knowledge, sometimes with a hedge attached, occasionally with a citation</a:t>
+            </a:r>
+          </a:p>
+          <a:p>
+            <a:r>
+              <a:t>that doesn't exist. That is week three's mechanism, on a system you built, in front of you. If</a:t>
+            </a:r>
+          </a:p>
+          <a:p>
+            <a:r>
+              <a:t>that happened to you in the last twenty minutes, that's the most valuable thing that will</a:t>
+            </a:r>
+          </a:p>
+          <a:p>
+            <a:r>
+              <a:t>happen to you in this course.</a:t>
             </a:r>
           </a:p>
           <a:p/>
           <a:p>
             <a:r>
-              <a:t>Test the system once, deliberately, rather than hoping to catch errors forever. You will not</a:t>
-            </a:r>
-          </a:p>
-          <a:p>
-            <a:r>
-              <a:t>catch them forever. Nobody does.</a:t>
+              <a:t>The hard questions expose retrieval rather than reasoning. Failures cluster on answers spread</a:t>
+            </a:r>
+          </a:p>
+          <a:p>
+            <a:r>
+              <a:t>across sections, stated as exceptions, or held in tables. And the diagnosis matters: the model</a:t>
+            </a:r>
+          </a:p>
+          <a:p>
+            <a:r>
+              <a:t>didn't reason badly. It never saw the right passage. Those need completely different fixes —</a:t>
+            </a:r>
+          </a:p>
+          <a:p>
+            <a:r>
+              <a:t>one is a prompting problem, the other is a document-structure problem, and you'd waste a lot of</a:t>
+            </a:r>
+          </a:p>
+          <a:p>
+            <a:r>
+              <a:t>time treating one as the other.</a:t>
             </a:r>
           </a:p>
           <a:p/>
           <a:p>
             <a:r>
-              <a:t>Three unanswerable questions tell you more than seven answerable ones.</a:t>
+              <a:t>And over-reading is the most common wrong answer. The claim is stronger than the sentence</a:t>
+            </a:r>
+          </a:p>
+          <a:p>
+            <a:r>
+              <a:t>supports. "May" becomes "must." A specific case becomes a general rule.</a:t>
             </a:r>
           </a:p>
           <a:p/>
           <a:p>
             <a:r>
-              <a:t>Grade the pattern, not the score.</a:t>
-            </a:r>
-          </a:p>
-          <a:p/>
-          <a:p>
-            <a:r>
-              <a:t>And asking twice is not checking. Verification requires something outside the system.</a:t>
-            </a:r>
-          </a:p>
-          <a:p/>
-          <a:p>
-            <a:r>
-              <a:t>Next week: agents and workflow automation. Today you tested a system where you saw every</a:t>
-            </a:r>
-          </a:p>
-          <a:p>
-            <a:r>
-              <a:t>answer. Next week we build something that runs several steps without you watching — and every</a:t>
-            </a:r>
-          </a:p>
-          <a:p>
-            <a:r>
-              <a:t>problem from today gets multiplied, because now the errors happen where nobody is looking.</a:t>
-            </a:r>
-          </a:p>
-          <a:p/>
-          <a:p>
-            <a:r>
-              <a:t>If today made you slightly uncomfortable, next week is designed to make that productive.</a:t>
-            </a:r>
-          </a:p>
-          <a:p/>
-          <a:p>
-            <a:r>
-              <a:t>Questions?</a:t>
+              <a:t>Go back and check yours for that specifically. It's easy to miss because the answer isn't</a:t>
+            </a:r>
+          </a:p>
+          <a:p>
+            <a:r>
+              <a:t>false, it's overstated.</a:t>
             </a:r>
           </a:p>
         </p:txBody>
@@ -1574,67 +1592,354 @@
           <a:lstStyle/>
           <a:p>
             <a:r>
-              <a:t>Take questions here.</a:t>
+              <a:t>A test set is only useful if it changes something. So: three findings and what each one should</a:t>
+            </a:r>
+          </a:p>
+          <a:p>
+            <a:r>
+              <a:t>make you do.</a:t>
             </a:r>
           </a:p>
           <a:p/>
           <a:p>
             <a:r>
-              <a:t>Common ones:</a:t>
+              <a:t>It answered an unanswerable question. Strengthen the refusal instruction, and make the string</a:t>
+            </a:r>
+          </a:p>
+          <a:p>
+            <a:r>
+              <a:t>shorter and more visible. Retest. And if it still answers — this is the important part — treat</a:t>
+            </a:r>
+          </a:p>
+          <a:p>
+            <a:r>
+              <a:t>every uncited claim from that system as unverified, permanently. You've learned that this</a:t>
+            </a:r>
+          </a:p>
+          <a:p>
+            <a:r>
+              <a:t>system's silence means nothing, so quotations become mandatory rather than nice to have.</a:t>
             </a:r>
           </a:p>
           <a:p/>
           <a:p>
             <a:r>
-              <a:t>"Ten questions doesn't sound like much." — It isn't statistically. It's not meant to be. It's</a:t>
-            </a:r>
-          </a:p>
-          <a:p>
-            <a:r>
-              <a:t>enough to characterise the failure shape, which is what you need. Ten questions you actually</a:t>
-            </a:r>
-          </a:p>
-          <a:p>
-            <a:r>
-              <a:t>run beat a hundred you plan and don't.</a:t>
+              <a:t>It failed on exceptions and material held in tables. Notice the diagnosis: that's a document</a:t>
+            </a:r>
+          </a:p>
+          <a:p>
+            <a:r>
+              <a:t>problem, not a prompting problem. No amount of rewording fixes a passage that was never</a:t>
+            </a:r>
+          </a:p>
+          <a:p>
+            <a:r>
+              <a:t>retrieved. Split the source into topic-sized sections with descriptive headings and retest the</a:t>
+            </a:r>
+          </a:p>
+          <a:p>
+            <a:r>
+              <a:t>same questions. If they now pass, you've confirmed the diagnosis.</a:t>
             </a:r>
           </a:p>
           <a:p/>
           <a:p>
             <a:r>
-              <a:t>"What if it passes everything?" — Then your unanswerable questions probably weren't plausible</a:t>
-            </a:r>
-          </a:p>
-          <a:p>
-            <a:r>
-              <a:t>enough, or too close to something in your documents. Make them harder and try again.</a:t>
+              <a:t>It over-read repeatedly. Add the constraint on the slide — do not state a requirement more</a:t>
+            </a:r>
+          </a:p>
+          <a:p>
+            <a:r>
+              <a:t>strongly than the source; if the source says may, do not write must. Then check that specific</a:t>
+            </a:r>
+          </a:p>
+          <a:p>
+            <a:r>
+              <a:t>behaviour again rather than assuming it's fixed.</a:t>
             </a:r>
           </a:p>
           <a:p/>
           <a:p>
             <a:r>
-              <a:t>"Do I need to redo this when I change something?" — Yes, at least the three unanswerable ones.</a:t>
-            </a:r>
-          </a:p>
-          <a:p>
-            <a:r>
-              <a:t>That's why ten is the right number — small enough to rerun.</a:t>
+              <a:t>The general shape: each failure mode has a different fix, which is exactly why naming the failure</a:t>
+            </a:r>
+          </a:p>
+          <a:p>
+            <a:r>
+              <a:t>matters more than noticing that something went wrong.</a:t>
+            </a:r>
+          </a:p>
+        </p:txBody>
+      </p:sp>
+      <p:sp>
+        <p:nvSpPr>
+          <p:cNvPr id="4" name="Slide Number Placeholder 3"/>
+          <p:cNvSpPr>
+            <a:spLocks noGrp="1"/>
+          </p:cNvSpPr>
+          <p:nvPr>
+            <p:ph type="sldNum" idx="5" sz="quarter"/>
+          </p:nvPr>
+        </p:nvSpPr>
+        <p:spPr/>
+      </p:sp>
+    </p:spTree>
+  </p:cSld>
+  <p:clrMapOvr>
+    <a:masterClrMapping/>
+  </p:clrMapOvr>
+</p:notes>
+</file>
+
+<file path=ppt/notesSlides/notesSlide18.xml><?xml version="1.0" encoding="utf-8"?>
+<p:notes xmlns:a="http://schemas.openxmlformats.org/drawingml/2006/main" xmlns:p="http://schemas.openxmlformats.org/presentationml/2006/main" xmlns:r="http://schemas.openxmlformats.org/officeDocument/2006/relationships">
+  <p:cSld>
+    <p:spTree>
+      <p:nvGrpSpPr>
+        <p:cNvPr id="1" name=""/>
+        <p:cNvGrpSpPr/>
+        <p:nvPr/>
+      </p:nvGrpSpPr>
+      <p:grpSpPr>
+        <a:xfrm>
+          <a:off x="0" y="0"/>
+          <a:ext cx="0" cy="0"/>
+          <a:chOff x="0" y="0"/>
+          <a:chExt cx="0" cy="0"/>
+        </a:xfrm>
+      </p:grpSpPr>
+      <p:sp>
+        <p:nvSpPr>
+          <p:cNvPr id="2" name="Slide Image Placeholder 1"/>
+          <p:cNvSpPr>
+            <a:spLocks noGrp="1"/>
+          </p:cNvSpPr>
+          <p:nvPr>
+            <p:ph type="sldImg" idx="2"/>
+          </p:nvPr>
+        </p:nvSpPr>
+        <p:spPr/>
+      </p:sp>
+      <p:sp>
+        <p:nvSpPr>
+          <p:cNvPr id="3" name="Notes Placeholder 2"/>
+          <p:cNvSpPr>
+            <a:spLocks noGrp="1"/>
+          </p:cNvSpPr>
+          <p:nvPr>
+            <p:ph type="body" idx="3" sz="quarter"/>
+          </p:nvPr>
+        </p:nvSpPr>
+        <p:spPr/>
+        <p:txBody>
+          <a:bodyPr/>
+          <a:lstStyle/>
+          <a:p>
+            <a:r>
+              <a:t>What's examinable from today, and this week is heavily represented on both exams.</a:t>
             </a:r>
           </a:p>
           <a:p/>
           <a:p>
             <a:r>
-              <a:t>"Isn't this what professional evaluation does?" — It's a simplified version of it, and the</a:t>
-            </a:r>
-          </a:p>
-          <a:p>
-            <a:r>
-              <a:t>professional versions add scale and automation. The logic is the same, and the logic is the</a:t>
-            </a:r>
-          </a:p>
-          <a:p>
-            <a:r>
-              <a:t>part that transfers.</a:t>
+              <a:t>The verification gap, including the counterintuitive part: it widens as output quality rises.</a:t>
+            </a:r>
+          </a:p>
+          <a:p>
+            <a:r>
+              <a:t>Expect to be asked why better models make checking harder.</a:t>
+            </a:r>
+          </a:p>
+          <a:p/>
+          <a:p>
+            <a:r>
+              <a:t>Test set structure. Seven answerable graded by difficulty, three plausible unanswerable ones,</a:t>
+            </a:r>
+          </a:p>
+          <a:p>
+            <a:r>
+              <a:t>expected answers written before running. I may give you a proposed test set and ask what's</a:t>
+            </a:r>
+          </a:p>
+          <a:p>
+            <a:r>
+              <a:t>wrong with it — usually the unanswerable questions are absurd rather than plausible, or the</a:t>
+            </a:r>
+          </a:p>
+          <a:p>
+            <a:r>
+              <a:t>questions are too vague to grade.</a:t>
+            </a:r>
+          </a:p>
+          <a:p/>
+          <a:p>
+            <a:r>
+              <a:t>Why the unanswerable ones matter most: they test behaviour in the situation you cannot detect</a:t>
+            </a:r>
+          </a:p>
+          <a:p>
+            <a:r>
+              <a:t>during normal use.</a:t>
+            </a:r>
+          </a:p>
+          <a:p/>
+          <a:p>
+            <a:r>
+              <a:t>The four grades, and reading the pattern rather than the score.</a:t>
+            </a:r>
+          </a:p>
+          <a:p/>
+          <a:p>
+            <a:r>
+              <a:t>And consistency is not correctness — with the reason. Repeating a question measures how common</a:t>
+            </a:r>
+          </a:p>
+          <a:p>
+            <a:r>
+              <a:t>a pattern is. Verification requires something outside the system. That is a near-certain exam</a:t>
+            </a:r>
+          </a:p>
+          <a:p>
+            <a:r>
+              <a:t>question.</a:t>
+            </a:r>
+          </a:p>
+        </p:txBody>
+      </p:sp>
+      <p:sp>
+        <p:nvSpPr>
+          <p:cNvPr id="4" name="Slide Number Placeholder 3"/>
+          <p:cNvSpPr>
+            <a:spLocks noGrp="1"/>
+          </p:cNvSpPr>
+          <p:nvPr>
+            <p:ph type="sldNum" idx="5" sz="quarter"/>
+          </p:nvPr>
+        </p:nvSpPr>
+        <p:spPr/>
+      </p:sp>
+    </p:spTree>
+  </p:cSld>
+  <p:clrMapOvr>
+    <a:masterClrMapping/>
+  </p:clrMapOvr>
+</p:notes>
+</file>
+
+<file path=ppt/notesSlides/notesSlide19.xml><?xml version="1.0" encoding="utf-8"?>
+<p:notes xmlns:a="http://schemas.openxmlformats.org/drawingml/2006/main" xmlns:p="http://schemas.openxmlformats.org/presentationml/2006/main" xmlns:r="http://schemas.openxmlformats.org/officeDocument/2006/relationships">
+  <p:cSld>
+    <p:spTree>
+      <p:nvGrpSpPr>
+        <p:cNvPr id="1" name=""/>
+        <p:cNvGrpSpPr/>
+        <p:nvPr/>
+      </p:nvGrpSpPr>
+      <p:grpSpPr>
+        <a:xfrm>
+          <a:off x="0" y="0"/>
+          <a:ext cx="0" cy="0"/>
+          <a:chOff x="0" y="0"/>
+          <a:chExt cx="0" cy="0"/>
+        </a:xfrm>
+      </p:grpSpPr>
+      <p:sp>
+        <p:nvSpPr>
+          <p:cNvPr id="2" name="Slide Image Placeholder 1"/>
+          <p:cNvSpPr>
+            <a:spLocks noGrp="1"/>
+          </p:cNvSpPr>
+          <p:nvPr>
+            <p:ph type="sldImg" idx="2"/>
+          </p:nvPr>
+        </p:nvSpPr>
+        <p:spPr/>
+      </p:sp>
+      <p:sp>
+        <p:nvSpPr>
+          <p:cNvPr id="3" name="Notes Placeholder 2"/>
+          <p:cNvSpPr>
+            <a:spLocks noGrp="1"/>
+          </p:cNvSpPr>
+          <p:nvPr>
+            <p:ph type="body" idx="3" sz="quarter"/>
+          </p:nvPr>
+        </p:nvSpPr>
+        <p:spPr/>
+        <p:txBody>
+          <a:bodyPr/>
+          <a:lstStyle/>
+          <a:p>
+            <a:r>
+              <a:t>Five things.</a:t>
+            </a:r>
+          </a:p>
+          <a:p/>
+          <a:p>
+            <a:r>
+              <a:t>Generating is fast, checking is slow, and the gap grows as quality rises. Which is why this</a:t>
+            </a:r>
+          </a:p>
+          <a:p>
+            <a:r>
+              <a:t>skill matters more over time, not less.</a:t>
+            </a:r>
+          </a:p>
+          <a:p/>
+          <a:p>
+            <a:r>
+              <a:t>Test the system once, deliberately, rather than hoping to catch errors forever. You will not</a:t>
+            </a:r>
+          </a:p>
+          <a:p>
+            <a:r>
+              <a:t>catch them forever. Nobody does.</a:t>
+            </a:r>
+          </a:p>
+          <a:p/>
+          <a:p>
+            <a:r>
+              <a:t>Three unanswerable questions tell you more than seven answerable ones.</a:t>
+            </a:r>
+          </a:p>
+          <a:p/>
+          <a:p>
+            <a:r>
+              <a:t>Grade the pattern, not the score.</a:t>
+            </a:r>
+          </a:p>
+          <a:p/>
+          <a:p>
+            <a:r>
+              <a:t>And asking twice is not checking. Verification requires something outside the system.</a:t>
+            </a:r>
+          </a:p>
+          <a:p/>
+          <a:p>
+            <a:r>
+              <a:t>Next week: agents and workflow automation. Today you tested a system where you saw every</a:t>
+            </a:r>
+          </a:p>
+          <a:p>
+            <a:r>
+              <a:t>answer. Next week we build something that runs several steps without you watching — and every</a:t>
+            </a:r>
+          </a:p>
+          <a:p>
+            <a:r>
+              <a:t>problem from today gets multiplied, because now the errors happen where nobody is looking.</a:t>
+            </a:r>
+          </a:p>
+          <a:p/>
+          <a:p>
+            <a:r>
+              <a:t>If today made you slightly uncomfortable, next week is designed to make that productive.</a:t>
+            </a:r>
+          </a:p>
+          <a:p/>
+          <a:p>
+            <a:r>
+              <a:t>Questions?</a:t>
             </a:r>
           </a:p>
         </p:txBody>
@@ -1766,6 +2071,136 @@
           <a:p>
             <a:r>
               <a:t>Then you build one and run it.</a:t>
+            </a:r>
+          </a:p>
+        </p:txBody>
+      </p:sp>
+      <p:sp>
+        <p:nvSpPr>
+          <p:cNvPr id="4" name="Slide Number Placeholder 3"/>
+          <p:cNvSpPr>
+            <a:spLocks noGrp="1"/>
+          </p:cNvSpPr>
+          <p:nvPr>
+            <p:ph type="sldNum" idx="5" sz="quarter"/>
+          </p:nvPr>
+        </p:nvSpPr>
+        <p:spPr/>
+      </p:sp>
+    </p:spTree>
+  </p:cSld>
+  <p:clrMapOvr>
+    <a:masterClrMapping/>
+  </p:clrMapOvr>
+</p:notes>
+</file>
+
+<file path=ppt/notesSlides/notesSlide20.xml><?xml version="1.0" encoding="utf-8"?>
+<p:notes xmlns:a="http://schemas.openxmlformats.org/drawingml/2006/main" xmlns:p="http://schemas.openxmlformats.org/presentationml/2006/main" xmlns:r="http://schemas.openxmlformats.org/officeDocument/2006/relationships">
+  <p:cSld>
+    <p:spTree>
+      <p:nvGrpSpPr>
+        <p:cNvPr id="1" name=""/>
+        <p:cNvGrpSpPr/>
+        <p:nvPr/>
+      </p:nvGrpSpPr>
+      <p:grpSpPr>
+        <a:xfrm>
+          <a:off x="0" y="0"/>
+          <a:ext cx="0" cy="0"/>
+          <a:chOff x="0" y="0"/>
+          <a:chExt cx="0" cy="0"/>
+        </a:xfrm>
+      </p:grpSpPr>
+      <p:sp>
+        <p:nvSpPr>
+          <p:cNvPr id="2" name="Slide Image Placeholder 1"/>
+          <p:cNvSpPr>
+            <a:spLocks noGrp="1"/>
+          </p:cNvSpPr>
+          <p:nvPr>
+            <p:ph type="sldImg" idx="2"/>
+          </p:nvPr>
+        </p:nvSpPr>
+        <p:spPr/>
+      </p:sp>
+      <p:sp>
+        <p:nvSpPr>
+          <p:cNvPr id="3" name="Notes Placeholder 2"/>
+          <p:cNvSpPr>
+            <a:spLocks noGrp="1"/>
+          </p:cNvSpPr>
+          <p:nvPr>
+            <p:ph type="body" idx="3" sz="quarter"/>
+          </p:nvPr>
+        </p:nvSpPr>
+        <p:spPr/>
+        <p:txBody>
+          <a:bodyPr/>
+          <a:lstStyle/>
+          <a:p>
+            <a:r>
+              <a:t>Take questions here.</a:t>
+            </a:r>
+          </a:p>
+          <a:p/>
+          <a:p>
+            <a:r>
+              <a:t>Common ones:</a:t>
+            </a:r>
+          </a:p>
+          <a:p/>
+          <a:p>
+            <a:r>
+              <a:t>"Ten questions doesn't sound like much." — It isn't statistically. It's not meant to be. It's</a:t>
+            </a:r>
+          </a:p>
+          <a:p>
+            <a:r>
+              <a:t>enough to characterise the failure shape, which is what you need. Ten questions you actually</a:t>
+            </a:r>
+          </a:p>
+          <a:p>
+            <a:r>
+              <a:t>run beat a hundred you plan and don't.</a:t>
+            </a:r>
+          </a:p>
+          <a:p/>
+          <a:p>
+            <a:r>
+              <a:t>"What if it passes everything?" — Then your unanswerable questions probably weren't plausible</a:t>
+            </a:r>
+          </a:p>
+          <a:p>
+            <a:r>
+              <a:t>enough, or too close to something in your documents. Make them harder and try again.</a:t>
+            </a:r>
+          </a:p>
+          <a:p/>
+          <a:p>
+            <a:r>
+              <a:t>"Do I need to redo this when I change something?" — Yes, at least the three unanswerable ones.</a:t>
+            </a:r>
+          </a:p>
+          <a:p>
+            <a:r>
+              <a:t>That's why ten is the right number — small enough to rerun.</a:t>
+            </a:r>
+          </a:p>
+          <a:p/>
+          <a:p>
+            <a:r>
+              <a:t>"Isn't this what professional evaluation does?" — It's a simplified version of it, and the</a:t>
+            </a:r>
+          </a:p>
+          <a:p>
+            <a:r>
+              <a:t>professional versions add scale and automation. The logic is the same, and the logic is the</a:t>
+            </a:r>
+          </a:p>
+          <a:p>
+            <a:r>
+              <a:t>part that transfers.</a:t>
             </a:r>
           </a:p>
         </p:txBody>
@@ -5913,7 +6348,7 @@
                 </a:solidFill>
                 <a:latin typeface="Calibri Light"/>
               </a:rPr>
-              <a:t>Grading What Comes Back</a:t>
+              <a:t>A Test Set, Written Out</a:t>
             </a:r>
           </a:p>
         </p:txBody>
@@ -5999,7 +6434,36 @@
                 </a:solidFill>
                 <a:latin typeface="Calibri"/>
               </a:rPr>
-              <a:t>•  For each of the ten, record one of:</a:t>
+              <a:t>•  Sources: a clinical guideline extract and a departmental protocol.</a:t>
+            </a:r>
+          </a:p>
+          <a:p>
+            <a:pPr>
+              <a:lnSpc>
+                <a:spcPct val="115000"/>
+              </a:lnSpc>
+              <a:spcAft>
+                <a:spcPts val="1000"/>
+              </a:spcAft>
+            </a:pPr>
+          </a:p>
+          <a:p>
+            <a:pPr>
+              <a:lnSpc>
+                <a:spcPct val="115000"/>
+              </a:lnSpc>
+              <a:spcAft>
+                <a:spcPts val="1000"/>
+              </a:spcAft>
+            </a:pPr>
+            <a:r>
+              <a:rPr sz="1900" b="1" i="0">
+                <a:solidFill>
+                  <a:srgbClr val="1F2937"/>
+                </a:solidFill>
+                <a:latin typeface="Calibri"/>
+              </a:rPr>
+              <a:t>•  Answerable (two of the seven):</a:t>
             </a:r>
           </a:p>
           <a:p>
@@ -6018,7 +6482,7 @@
                 </a:solidFill>
                 <a:latin typeface="Calibri"/>
               </a:rPr>
-              <a:t>—  CORRECT — right answer, and the quotation genuinely supports it</a:t>
+              <a:t>—  "What monitoring interval does the guideline state for the first 48 hours?"  — stated plainly</a:t>
             </a:r>
           </a:p>
           <a:p>
@@ -6037,7 +6501,36 @@
                 </a:solidFill>
                 <a:latin typeface="Calibri"/>
               </a:rPr>
-              <a:t>—  UNSUPPORTED — plausible answer, but no quotation, or a quotation that does not support it</a:t>
+              <a:t>—  "Which patients are excluded from the standard pathway?"  — phrased as an exception, so harder</a:t>
+            </a:r>
+          </a:p>
+          <a:p>
+            <a:pPr>
+              <a:lnSpc>
+                <a:spcPct val="115000"/>
+              </a:lnSpc>
+              <a:spcAft>
+                <a:spcPts val="1000"/>
+              </a:spcAft>
+            </a:pPr>
+          </a:p>
+          <a:p>
+            <a:pPr>
+              <a:lnSpc>
+                <a:spcPct val="115000"/>
+              </a:lnSpc>
+              <a:spcAft>
+                <a:spcPts val="1000"/>
+              </a:spcAft>
+            </a:pPr>
+            <a:r>
+              <a:rPr sz="1900" b="1" i="0">
+                <a:solidFill>
+                  <a:srgbClr val="1F2937"/>
+                </a:solidFill>
+                <a:latin typeface="Calibri"/>
+              </a:rPr>
+              <a:t>•  Unanswerable (all three):</a:t>
             </a:r>
           </a:p>
           <a:p>
@@ -6056,7 +6549,7 @@
                 </a:solidFill>
                 <a:latin typeface="Calibri"/>
               </a:rPr>
-              <a:t>—  WRONG — the answer contradicts the source</a:t>
+              <a:t>—  "What does the guideline say about paediatric patients?"  — the extract covers adults only</a:t>
             </a:r>
           </a:p>
           <a:p>
@@ -6075,36 +6568,7 @@
                 </a:solidFill>
                 <a:latin typeface="Calibri"/>
               </a:rPr>
-              <a:t>—  REFUSED — said NOT IN SOURCES</a:t>
-            </a:r>
-          </a:p>
-          <a:p>
-            <a:pPr>
-              <a:lnSpc>
-                <a:spcPct val="115000"/>
-              </a:lnSpc>
-              <a:spcAft>
-                <a:spcPts val="1000"/>
-              </a:spcAft>
-            </a:pPr>
-          </a:p>
-          <a:p>
-            <a:pPr>
-              <a:lnSpc>
-                <a:spcPct val="115000"/>
-              </a:lnSpc>
-              <a:spcAft>
-                <a:spcPts val="1000"/>
-              </a:spcAft>
-            </a:pPr>
-            <a:r>
-              <a:rPr sz="1900" b="1" i="0">
-                <a:solidFill>
-                  <a:srgbClr val="1F2937"/>
-                </a:solidFill>
-                <a:latin typeface="Calibri"/>
-              </a:rPr>
-              <a:t>•  Then read the pattern, not the score:</a:t>
+              <a:t>—  "What is the equivalent recommendation in the 2027 update?"  — a later version we do not hold</a:t>
             </a:r>
           </a:p>
           <a:p>
@@ -6123,26 +6587,7 @@
                 </a:solidFill>
                 <a:latin typeface="Calibri"/>
               </a:rPr>
-              <a:t>—  REFUSED on all three unanswerable questions is the result you want</a:t>
-            </a:r>
-          </a:p>
-          <a:p>
-            <a:pPr lvl="1">
-              <a:lnSpc>
-                <a:spcPct val="115000"/>
-              </a:lnSpc>
-              <a:spcAft>
-                <a:spcPts val="500"/>
-              </a:spcAft>
-            </a:pPr>
-            <a:r>
-              <a:rPr sz="1600" b="0" i="0">
-                <a:solidFill>
-                  <a:srgbClr val="333D4B"/>
-                </a:solidFill>
-                <a:latin typeface="Calibri"/>
-              </a:rPr>
-              <a:t>—  UNSUPPORTED on any of the three is your headline finding — write it down</a:t>
+              <a:t>—  "How does this compare with the German guideline?"  — an adjacent source we never loaded</a:t>
             </a:r>
           </a:p>
         </p:txBody>
@@ -6263,7 +6708,7 @@
                 </a:solidFill>
                 <a:latin typeface="Calibri Light"/>
               </a:rPr>
-              <a:t>Why Asking Twice Is Not Checking</a:t>
+              <a:t>Good and Bad Unanswerable Questions</a:t>
             </a:r>
           </a:p>
         </p:txBody>
@@ -6314,14 +6759,542 @@
       </p:sp>
       <p:sp>
         <p:nvSpPr>
-          <p:cNvPr id="4" name="TextBox 3"/>
+          <p:cNvPr id="4" name="Rounded Rectangle 3"/>
+          <p:cNvSpPr/>
+          <p:nvPr/>
+        </p:nvSpPr>
+        <p:spPr>
+          <a:xfrm>
+            <a:off x="777240" y="2057400"/>
+            <a:ext cx="3301898" cy="3200400"/>
+          </a:xfrm>
+          <a:prstGeom prst="roundRect">
+            <a:avLst>
+              <a:gd name="adj" fmla="val 10000"/>
+            </a:avLst>
+          </a:prstGeom>
+          <a:solidFill>
+            <a:srgbClr val="F1F5F9"/>
+          </a:solidFill>
+          <a:ln w="15875">
+            <a:solidFill>
+              <a:srgbClr val="D3DDE6"/>
+            </a:solidFill>
+          </a:ln>
+          <a:effectLst/>
+        </p:spPr>
+        <p:style>
+          <a:lnRef idx="1">
+            <a:schemeClr val="accent1"/>
+          </a:lnRef>
+          <a:fillRef idx="3">
+            <a:schemeClr val="accent1"/>
+          </a:fillRef>
+          <a:effectRef idx="2">
+            <a:schemeClr val="accent1"/>
+          </a:effectRef>
+          <a:fontRef idx="minor">
+            <a:schemeClr val="lt1"/>
+          </a:fontRef>
+        </p:style>
+        <p:txBody>
+          <a:bodyPr rtlCol="0" anchor="ctr"/>
+          <a:lstStyle/>
+          <a:p>
+            <a:pPr algn="ctr"/>
+          </a:p>
+        </p:txBody>
+      </p:sp>
+      <p:sp>
+        <p:nvSpPr>
+          <p:cNvPr id="5" name="Rectangle 4"/>
+          <p:cNvSpPr/>
+          <p:nvPr/>
+        </p:nvSpPr>
+        <p:spPr>
+          <a:xfrm>
+            <a:off x="978408" y="2331720"/>
+            <a:ext cx="640080" cy="38100"/>
+          </a:xfrm>
+          <a:prstGeom prst="rect">
+            <a:avLst/>
+          </a:prstGeom>
+          <a:solidFill>
+            <a:srgbClr val="0F766E"/>
+          </a:solidFill>
+          <a:ln>
+            <a:noFill/>
+          </a:ln>
+          <a:effectLst/>
+        </p:spPr>
+        <p:style>
+          <a:lnRef idx="1">
+            <a:schemeClr val="accent1"/>
+          </a:lnRef>
+          <a:fillRef idx="3">
+            <a:schemeClr val="accent1"/>
+          </a:fillRef>
+          <a:effectRef idx="2">
+            <a:schemeClr val="accent1"/>
+          </a:effectRef>
+          <a:fontRef idx="minor">
+            <a:schemeClr val="lt1"/>
+          </a:fontRef>
+        </p:style>
+        <p:txBody>
+          <a:bodyPr rtlCol="0" anchor="ctr"/>
+          <a:lstStyle/>
+          <a:p>
+            <a:pPr algn="ctr"/>
+          </a:p>
+        </p:txBody>
+      </p:sp>
+      <p:sp>
+        <p:nvSpPr>
+          <p:cNvPr id="6" name="TextBox 5"/>
           <p:cNvSpPr txBox="1"/>
           <p:nvPr/>
         </p:nvSpPr>
         <p:spPr>
           <a:xfrm>
-            <a:off x="777240" y="1783080"/>
-            <a:ext cx="10637215" cy="4343400"/>
+            <a:off x="978408" y="2560320"/>
+            <a:ext cx="2899562" cy="640080"/>
+          </a:xfrm>
+          <a:prstGeom prst="rect">
+            <a:avLst/>
+          </a:prstGeom>
+          <a:noFill/>
+        </p:spPr>
+        <p:txBody>
+          <a:bodyPr wrap="square" lIns="0" rIns="0" tIns="0" bIns="0" anchor="t">
+            <a:spAutoFit/>
+          </a:bodyPr>
+          <a:lstStyle/>
+          <a:p>
+            <a:pPr algn="l">
+              <a:lnSpc>
+                <a:spcPct val="105000"/>
+              </a:lnSpc>
+              <a:spcAft>
+                <a:spcPts val="200"/>
+              </a:spcAft>
+            </a:pPr>
+            <a:r>
+              <a:rPr sz="1800" b="1" i="0">
+                <a:solidFill>
+                  <a:srgbClr val="1F2937"/>
+                </a:solidFill>
+                <a:latin typeface="Calibri"/>
+              </a:rPr>
+              <a:t>Good</a:t>
+            </a:r>
+          </a:p>
+        </p:txBody>
+      </p:sp>
+      <p:sp>
+        <p:nvSpPr>
+          <p:cNvPr id="7" name="TextBox 6"/>
+          <p:cNvSpPr txBox="1"/>
+          <p:nvPr/>
+        </p:nvSpPr>
+        <p:spPr>
+          <a:xfrm>
+            <a:off x="978408" y="3246120"/>
+            <a:ext cx="2899562" cy="1737360"/>
+          </a:xfrm>
+          <a:prstGeom prst="rect">
+            <a:avLst/>
+          </a:prstGeom>
+          <a:noFill/>
+        </p:spPr>
+        <p:txBody>
+          <a:bodyPr wrap="square" lIns="0" rIns="0" tIns="0" bIns="0" anchor="t">
+            <a:spAutoFit/>
+          </a:bodyPr>
+          <a:lstStyle/>
+          <a:p>
+            <a:pPr algn="l">
+              <a:lnSpc>
+                <a:spcPct val="105000"/>
+              </a:lnSpc>
+              <a:spcAft>
+                <a:spcPts val="200"/>
+              </a:spcAft>
+            </a:pPr>
+            <a:r>
+              <a:rPr sz="1350" b="0" i="0">
+                <a:solidFill>
+                  <a:srgbClr val="333D4B"/>
+                </a:solidFill>
+                <a:latin typeface="Calibri"/>
+              </a:rPr>
+              <a:t>"What does it say about paediatric patients?" — a colleague would genuinely ask this, the topic is adjacent, and the sources happen not to cover it. The system has just enough to be tempted.</a:t>
+            </a:r>
+          </a:p>
+        </p:txBody>
+      </p:sp>
+      <p:sp>
+        <p:nvSpPr>
+          <p:cNvPr id="8" name="Rounded Rectangle 7"/>
+          <p:cNvSpPr/>
+          <p:nvPr/>
+        </p:nvSpPr>
+        <p:spPr>
+          <a:xfrm>
+            <a:off x="4444898" y="2057400"/>
+            <a:ext cx="3301898" cy="3200400"/>
+          </a:xfrm>
+          <a:prstGeom prst="roundRect">
+            <a:avLst>
+              <a:gd name="adj" fmla="val 10000"/>
+            </a:avLst>
+          </a:prstGeom>
+          <a:solidFill>
+            <a:srgbClr val="F1F5F9"/>
+          </a:solidFill>
+          <a:ln w="15875">
+            <a:solidFill>
+              <a:srgbClr val="D3DDE6"/>
+            </a:solidFill>
+          </a:ln>
+          <a:effectLst/>
+        </p:spPr>
+        <p:style>
+          <a:lnRef idx="1">
+            <a:schemeClr val="accent1"/>
+          </a:lnRef>
+          <a:fillRef idx="3">
+            <a:schemeClr val="accent1"/>
+          </a:fillRef>
+          <a:effectRef idx="2">
+            <a:schemeClr val="accent1"/>
+          </a:effectRef>
+          <a:fontRef idx="minor">
+            <a:schemeClr val="lt1"/>
+          </a:fontRef>
+        </p:style>
+        <p:txBody>
+          <a:bodyPr rtlCol="0" anchor="ctr"/>
+          <a:lstStyle/>
+          <a:p>
+            <a:pPr algn="ctr"/>
+          </a:p>
+        </p:txBody>
+      </p:sp>
+      <p:sp>
+        <p:nvSpPr>
+          <p:cNvPr id="9" name="Rectangle 8"/>
+          <p:cNvSpPr/>
+          <p:nvPr/>
+        </p:nvSpPr>
+        <p:spPr>
+          <a:xfrm>
+            <a:off x="4646066" y="2331720"/>
+            <a:ext cx="640080" cy="38100"/>
+          </a:xfrm>
+          <a:prstGeom prst="rect">
+            <a:avLst/>
+          </a:prstGeom>
+          <a:solidFill>
+            <a:srgbClr val="0F766E"/>
+          </a:solidFill>
+          <a:ln>
+            <a:noFill/>
+          </a:ln>
+          <a:effectLst/>
+        </p:spPr>
+        <p:style>
+          <a:lnRef idx="1">
+            <a:schemeClr val="accent1"/>
+          </a:lnRef>
+          <a:fillRef idx="3">
+            <a:schemeClr val="accent1"/>
+          </a:fillRef>
+          <a:effectRef idx="2">
+            <a:schemeClr val="accent1"/>
+          </a:effectRef>
+          <a:fontRef idx="minor">
+            <a:schemeClr val="lt1"/>
+          </a:fontRef>
+        </p:style>
+        <p:txBody>
+          <a:bodyPr rtlCol="0" anchor="ctr"/>
+          <a:lstStyle/>
+          <a:p>
+            <a:pPr algn="ctr"/>
+          </a:p>
+        </p:txBody>
+      </p:sp>
+      <p:sp>
+        <p:nvSpPr>
+          <p:cNvPr id="10" name="TextBox 9"/>
+          <p:cNvSpPr txBox="1"/>
+          <p:nvPr/>
+        </p:nvSpPr>
+        <p:spPr>
+          <a:xfrm>
+            <a:off x="4646066" y="2560320"/>
+            <a:ext cx="2899562" cy="640080"/>
+          </a:xfrm>
+          <a:prstGeom prst="rect">
+            <a:avLst/>
+          </a:prstGeom>
+          <a:noFill/>
+        </p:spPr>
+        <p:txBody>
+          <a:bodyPr wrap="square" lIns="0" rIns="0" tIns="0" bIns="0" anchor="t">
+            <a:spAutoFit/>
+          </a:bodyPr>
+          <a:lstStyle/>
+          <a:p>
+            <a:pPr algn="l">
+              <a:lnSpc>
+                <a:spcPct val="105000"/>
+              </a:lnSpc>
+              <a:spcAft>
+                <a:spcPts val="200"/>
+              </a:spcAft>
+            </a:pPr>
+            <a:r>
+              <a:rPr sz="1800" b="1" i="0">
+                <a:solidFill>
+                  <a:srgbClr val="1F2937"/>
+                </a:solidFill>
+                <a:latin typeface="Calibri"/>
+              </a:rPr>
+              <a:t>Bad — too absurd</a:t>
+            </a:r>
+          </a:p>
+        </p:txBody>
+      </p:sp>
+      <p:sp>
+        <p:nvSpPr>
+          <p:cNvPr id="11" name="TextBox 10"/>
+          <p:cNvSpPr txBox="1"/>
+          <p:nvPr/>
+        </p:nvSpPr>
+        <p:spPr>
+          <a:xfrm>
+            <a:off x="4646066" y="3246120"/>
+            <a:ext cx="2899562" cy="1737360"/>
+          </a:xfrm>
+          <a:prstGeom prst="rect">
+            <a:avLst/>
+          </a:prstGeom>
+          <a:noFill/>
+        </p:spPr>
+        <p:txBody>
+          <a:bodyPr wrap="square" lIns="0" rIns="0" tIns="0" bIns="0" anchor="t">
+            <a:spAutoFit/>
+          </a:bodyPr>
+          <a:lstStyle/>
+          <a:p>
+            <a:pPr algn="l">
+              <a:lnSpc>
+                <a:spcPct val="105000"/>
+              </a:lnSpc>
+              <a:spcAft>
+                <a:spcPts val="200"/>
+              </a:spcAft>
+            </a:pPr>
+            <a:r>
+              <a:rPr sz="1350" b="0" i="0">
+                <a:solidFill>
+                  <a:srgbClr val="333D4B"/>
+                </a:solidFill>
+                <a:latin typeface="Calibri"/>
+              </a:rPr>
+              <a:t>"What does the clinical guideline say about football?" It will refuse, you will learn nothing, and you will conclude wrongly that your system is well behaved.</a:t>
+            </a:r>
+          </a:p>
+        </p:txBody>
+      </p:sp>
+      <p:sp>
+        <p:nvSpPr>
+          <p:cNvPr id="12" name="Rounded Rectangle 11"/>
+          <p:cNvSpPr/>
+          <p:nvPr/>
+        </p:nvSpPr>
+        <p:spPr>
+          <a:xfrm>
+            <a:off x="8112556" y="2057400"/>
+            <a:ext cx="3301898" cy="3200400"/>
+          </a:xfrm>
+          <a:prstGeom prst="roundRect">
+            <a:avLst>
+              <a:gd name="adj" fmla="val 10000"/>
+            </a:avLst>
+          </a:prstGeom>
+          <a:solidFill>
+            <a:srgbClr val="F1F5F9"/>
+          </a:solidFill>
+          <a:ln w="15875">
+            <a:solidFill>
+              <a:srgbClr val="D3DDE6"/>
+            </a:solidFill>
+          </a:ln>
+          <a:effectLst/>
+        </p:spPr>
+        <p:style>
+          <a:lnRef idx="1">
+            <a:schemeClr val="accent1"/>
+          </a:lnRef>
+          <a:fillRef idx="3">
+            <a:schemeClr val="accent1"/>
+          </a:fillRef>
+          <a:effectRef idx="2">
+            <a:schemeClr val="accent1"/>
+          </a:effectRef>
+          <a:fontRef idx="minor">
+            <a:schemeClr val="lt1"/>
+          </a:fontRef>
+        </p:style>
+        <p:txBody>
+          <a:bodyPr rtlCol="0" anchor="ctr"/>
+          <a:lstStyle/>
+          <a:p>
+            <a:pPr algn="ctr"/>
+          </a:p>
+        </p:txBody>
+      </p:sp>
+      <p:sp>
+        <p:nvSpPr>
+          <p:cNvPr id="13" name="Rectangle 12"/>
+          <p:cNvSpPr/>
+          <p:nvPr/>
+        </p:nvSpPr>
+        <p:spPr>
+          <a:xfrm>
+            <a:off x="8313724" y="2331720"/>
+            <a:ext cx="640080" cy="38100"/>
+          </a:xfrm>
+          <a:prstGeom prst="rect">
+            <a:avLst/>
+          </a:prstGeom>
+          <a:solidFill>
+            <a:srgbClr val="0F766E"/>
+          </a:solidFill>
+          <a:ln>
+            <a:noFill/>
+          </a:ln>
+          <a:effectLst/>
+        </p:spPr>
+        <p:style>
+          <a:lnRef idx="1">
+            <a:schemeClr val="accent1"/>
+          </a:lnRef>
+          <a:fillRef idx="3">
+            <a:schemeClr val="accent1"/>
+          </a:fillRef>
+          <a:effectRef idx="2">
+            <a:schemeClr val="accent1"/>
+          </a:effectRef>
+          <a:fontRef idx="minor">
+            <a:schemeClr val="lt1"/>
+          </a:fontRef>
+        </p:style>
+        <p:txBody>
+          <a:bodyPr rtlCol="0" anchor="ctr"/>
+          <a:lstStyle/>
+          <a:p>
+            <a:pPr algn="ctr"/>
+          </a:p>
+        </p:txBody>
+      </p:sp>
+      <p:sp>
+        <p:nvSpPr>
+          <p:cNvPr id="14" name="TextBox 13"/>
+          <p:cNvSpPr txBox="1"/>
+          <p:nvPr/>
+        </p:nvSpPr>
+        <p:spPr>
+          <a:xfrm>
+            <a:off x="8313724" y="2560320"/>
+            <a:ext cx="2899562" cy="640080"/>
+          </a:xfrm>
+          <a:prstGeom prst="rect">
+            <a:avLst/>
+          </a:prstGeom>
+          <a:noFill/>
+        </p:spPr>
+        <p:txBody>
+          <a:bodyPr wrap="square" lIns="0" rIns="0" tIns="0" bIns="0" anchor="t">
+            <a:spAutoFit/>
+          </a:bodyPr>
+          <a:lstStyle/>
+          <a:p>
+            <a:pPr algn="l">
+              <a:lnSpc>
+                <a:spcPct val="105000"/>
+              </a:lnSpc>
+              <a:spcAft>
+                <a:spcPts val="200"/>
+              </a:spcAft>
+            </a:pPr>
+            <a:r>
+              <a:rPr sz="1800" b="1" i="0">
+                <a:solidFill>
+                  <a:srgbClr val="1F2937"/>
+                </a:solidFill>
+                <a:latin typeface="Calibri"/>
+              </a:rPr>
+              <a:t>Bad — actually answerable</a:t>
+            </a:r>
+          </a:p>
+        </p:txBody>
+      </p:sp>
+      <p:sp>
+        <p:nvSpPr>
+          <p:cNvPr id="15" name="TextBox 14"/>
+          <p:cNvSpPr txBox="1"/>
+          <p:nvPr/>
+        </p:nvSpPr>
+        <p:spPr>
+          <a:xfrm>
+            <a:off x="8313724" y="3246120"/>
+            <a:ext cx="2899562" cy="1737360"/>
+          </a:xfrm>
+          <a:prstGeom prst="rect">
+            <a:avLst/>
+          </a:prstGeom>
+          <a:noFill/>
+        </p:spPr>
+        <p:txBody>
+          <a:bodyPr wrap="square" lIns="0" rIns="0" tIns="0" bIns="0" anchor="t">
+            <a:spAutoFit/>
+          </a:bodyPr>
+          <a:lstStyle/>
+          <a:p>
+            <a:pPr algn="l">
+              <a:lnSpc>
+                <a:spcPct val="105000"/>
+              </a:lnSpc>
+              <a:spcAft>
+                <a:spcPts val="200"/>
+              </a:spcAft>
+            </a:pPr>
+            <a:r>
+              <a:rPr sz="1350" b="0" i="0">
+                <a:solidFill>
+                  <a:srgbClr val="333D4B"/>
+                </a:solidFill>
+                <a:latin typeface="Calibri"/>
+              </a:rPr>
+              <a:t>A question you believe is uncovered but which the source addresses obliquely. You will record a false finding. Check your sources before deciding a question is unanswerable.</a:t>
+            </a:r>
+          </a:p>
+        </p:txBody>
+      </p:sp>
+      <p:sp>
+        <p:nvSpPr>
+          <p:cNvPr id="16" name="TextBox 15"/>
+          <p:cNvSpPr txBox="1"/>
+          <p:nvPr/>
+        </p:nvSpPr>
+        <p:spPr>
+          <a:xfrm>
+            <a:off x="777240" y="6355080"/>
+            <a:ext cx="10637215" cy="274320"/>
           </a:xfrm>
           <a:prstGeom prst="rect">
             <a:avLst/>
@@ -6334,208 +7307,13 @@
           </a:bodyPr>
           <a:lstStyle/>
           <a:p>
-            <a:pPr>
-              <a:lnSpc>
-                <a:spcPct val="115000"/>
-              </a:lnSpc>
-              <a:spcAft>
-                <a:spcPts val="1000"/>
-              </a:spcAft>
-            </a:pPr>
-            <a:r>
-              <a:rPr sz="1900" b="0" i="0">
-                <a:solidFill>
-                  <a:srgbClr val="1F2937"/>
+            <a:r>
+              <a:rPr sz="1000" b="0" i="0">
+                <a:solidFill>
+                  <a:srgbClr val="6B7787"/>
                 </a:solidFill>
                 <a:latin typeface="Calibri"/>
               </a:rPr>
-              <a:t>•  The most common informal verification method, and it does not work</a:t>
-            </a:r>
-          </a:p>
-          <a:p>
-            <a:pPr lvl="1">
-              <a:lnSpc>
-                <a:spcPct val="115000"/>
-              </a:lnSpc>
-              <a:spcAft>
-                <a:spcPts val="500"/>
-              </a:spcAft>
-            </a:pPr>
-            <a:r>
-              <a:rPr sz="1600" b="0" i="0">
-                <a:solidFill>
-                  <a:srgbClr val="333D4B"/>
-                </a:solidFill>
-                <a:latin typeface="Calibri"/>
-              </a:rPr>
-              <a:t>—  You get an answer, feel unsure, ask again, get something similar, feel reassured</a:t>
-            </a:r>
-          </a:p>
-          <a:p>
-            <a:pPr>
-              <a:lnSpc>
-                <a:spcPct val="115000"/>
-              </a:lnSpc>
-              <a:spcAft>
-                <a:spcPts val="1000"/>
-              </a:spcAft>
-            </a:pPr>
-          </a:p>
-          <a:p>
-            <a:pPr>
-              <a:lnSpc>
-                <a:spcPct val="115000"/>
-              </a:lnSpc>
-              <a:spcAft>
-                <a:spcPts val="1000"/>
-              </a:spcAft>
-            </a:pPr>
-            <a:r>
-              <a:rPr sz="1900" b="1" i="0">
-                <a:solidFill>
-                  <a:srgbClr val="1F2937"/>
-                </a:solidFill>
-                <a:latin typeface="Calibri"/>
-              </a:rPr>
-              <a:t>•  What consistency actually measures:</a:t>
-            </a:r>
-          </a:p>
-          <a:p>
-            <a:pPr lvl="1">
-              <a:lnSpc>
-                <a:spcPct val="115000"/>
-              </a:lnSpc>
-              <a:spcAft>
-                <a:spcPts val="500"/>
-              </a:spcAft>
-            </a:pPr>
-            <a:r>
-              <a:rPr sz="1600" b="0" i="0">
-                <a:solidFill>
-                  <a:srgbClr val="333D4B"/>
-                </a:solidFill>
-                <a:latin typeface="Calibri"/>
-              </a:rPr>
-              <a:t>—  How strongly the pattern is represented in the training data — not whether it is true</a:t>
-            </a:r>
-          </a:p>
-          <a:p>
-            <a:pPr lvl="1">
-              <a:lnSpc>
-                <a:spcPct val="115000"/>
-              </a:lnSpc>
-              <a:spcAft>
-                <a:spcPts val="500"/>
-              </a:spcAft>
-            </a:pPr>
-            <a:r>
-              <a:rPr sz="1600" b="0" i="0">
-                <a:solidFill>
-                  <a:srgbClr val="333D4B"/>
-                </a:solidFill>
-                <a:latin typeface="Calibri"/>
-              </a:rPr>
-              <a:t>—  A widely repeated error is reproduced very consistently indeed</a:t>
-            </a:r>
-          </a:p>
-          <a:p>
-            <a:pPr>
-              <a:lnSpc>
-                <a:spcPct val="115000"/>
-              </a:lnSpc>
-              <a:spcAft>
-                <a:spcPts val="1000"/>
-              </a:spcAft>
-            </a:pPr>
-          </a:p>
-          <a:p>
-            <a:pPr>
-              <a:lnSpc>
-                <a:spcPct val="115000"/>
-              </a:lnSpc>
-              <a:spcAft>
-                <a:spcPts val="1000"/>
-              </a:spcAft>
-            </a:pPr>
-            <a:r>
-              <a:rPr sz="1900" b="1" i="0">
-                <a:solidFill>
-                  <a:srgbClr val="1F2937"/>
-                </a:solidFill>
-                <a:latin typeface="Calibri"/>
-              </a:rPr>
-              <a:t>•  What does work:</a:t>
-            </a:r>
-          </a:p>
-          <a:p>
-            <a:pPr lvl="1">
-              <a:lnSpc>
-                <a:spcPct val="115000"/>
-              </a:lnSpc>
-              <a:spcAft>
-                <a:spcPts val="500"/>
-              </a:spcAft>
-            </a:pPr>
-            <a:r>
-              <a:rPr sz="1600" b="0" i="0">
-                <a:solidFill>
-                  <a:srgbClr val="333D4B"/>
-                </a:solidFill>
-                <a:latin typeface="Calibri"/>
-              </a:rPr>
-              <a:t>—  Check against a source. Check against something you already know. Ask for the quotation and look it up.</a:t>
-            </a:r>
-          </a:p>
-          <a:p>
-            <a:pPr lvl="1">
-              <a:lnSpc>
-                <a:spcPct val="115000"/>
-              </a:lnSpc>
-              <a:spcAft>
-                <a:spcPts val="500"/>
-              </a:spcAft>
-            </a:pPr>
-            <a:r>
-              <a:rPr sz="1600" b="0" i="0">
-                <a:solidFill>
-                  <a:srgbClr val="333D4B"/>
-                </a:solidFill>
-                <a:latin typeface="Calibri"/>
-              </a:rPr>
-              <a:t>—  Asking a different model is slightly better than asking the same one twice — but they may share the same error.</a:t>
-            </a:r>
-          </a:p>
-        </p:txBody>
-      </p:sp>
-      <p:sp>
-        <p:nvSpPr>
-          <p:cNvPr id="5" name="TextBox 4"/>
-          <p:cNvSpPr txBox="1"/>
-          <p:nvPr/>
-        </p:nvSpPr>
-        <p:spPr>
-          <a:xfrm>
-            <a:off x="777240" y="6355080"/>
-            <a:ext cx="10637215" cy="274320"/>
-          </a:xfrm>
-          <a:prstGeom prst="rect">
-            <a:avLst/>
-          </a:prstGeom>
-          <a:noFill/>
-        </p:spPr>
-        <p:txBody>
-          <a:bodyPr wrap="square" lIns="0" rIns="0" tIns="0" bIns="0">
-            <a:spAutoFit/>
-          </a:bodyPr>
-          <a:lstStyle/>
-          <a:p>
-            <a:r>
-              <a:rPr sz="1000" b="0" i="0">
-                <a:solidFill>
-                  <a:srgbClr val="6B7787"/>
-                </a:solidFill>
-                <a:latin typeface="Calibri"/>
-              </a:rPr>
               <a:t>Week 8  ·  Prompt Engineering and Large Language Models</a:t>
             </a:r>
           </a:p>
@@ -6543,7 +7321,7 @@
       </p:sp>
       <p:sp>
         <p:nvSpPr>
-          <p:cNvPr id="6" name="TextBox 5"/>
+          <p:cNvPr id="17" name="TextBox 16"/>
           <p:cNvSpPr txBox="1"/>
           <p:nvPr/>
         </p:nvSpPr>
@@ -6596,14 +7374,48 @@
       <p:grpSpPr/>
       <p:sp>
         <p:nvSpPr>
-          <p:cNvPr id="2" name="Rectangle 1"/>
+          <p:cNvPr id="2" name="TextBox 1"/>
+          <p:cNvSpPr txBox="1"/>
+          <p:nvPr/>
+        </p:nvSpPr>
+        <p:spPr>
+          <a:xfrm>
+            <a:off x="777240" y="566928"/>
+            <a:ext cx="10637215" cy="822960"/>
+          </a:xfrm>
+          <a:prstGeom prst="rect">
+            <a:avLst/>
+          </a:prstGeom>
+          <a:noFill/>
+        </p:spPr>
+        <p:txBody>
+          <a:bodyPr wrap="square" lIns="0" rIns="0" tIns="0" bIns="0">
+            <a:spAutoFit/>
+          </a:bodyPr>
+          <a:lstStyle/>
+          <a:p>
+            <a:r>
+              <a:rPr sz="3000" b="1" i="0">
+                <a:solidFill>
+                  <a:srgbClr val="1F2937"/>
+                </a:solidFill>
+                <a:latin typeface="Calibri Light"/>
+              </a:rPr>
+              <a:t>Grading What Comes Back</a:t>
+            </a:r>
+          </a:p>
+        </p:txBody>
+      </p:sp>
+      <p:sp>
+        <p:nvSpPr>
+          <p:cNvPr id="3" name="Rectangle 2"/>
           <p:cNvSpPr/>
           <p:nvPr/>
         </p:nvSpPr>
         <p:spPr>
           <a:xfrm>
-            <a:off x="0" y="0"/>
-            <a:ext cx="292608" cy="6858000"/>
+            <a:off x="777240" y="1417320"/>
+            <a:ext cx="1051560" cy="38100"/>
           </a:xfrm>
           <a:prstGeom prst="rect">
             <a:avLst/>
@@ -6640,14 +7452,14 @@
       </p:sp>
       <p:sp>
         <p:nvSpPr>
-          <p:cNvPr id="3" name="TextBox 2"/>
+          <p:cNvPr id="4" name="TextBox 3"/>
           <p:cNvSpPr txBox="1"/>
           <p:nvPr/>
         </p:nvSpPr>
         <p:spPr>
           <a:xfrm>
-            <a:off x="1280160" y="2743200"/>
-            <a:ext cx="10058400" cy="457200"/>
+            <a:off x="777240" y="1783080"/>
+            <a:ext cx="10637215" cy="4343400"/>
           </a:xfrm>
           <a:prstGeom prst="rect">
             <a:avLst/>
@@ -6660,28 +7472,179 @@
           </a:bodyPr>
           <a:lstStyle/>
           <a:p>
-            <a:r>
-              <a:rPr sz="1400" b="1" i="0">
-                <a:solidFill>
-                  <a:srgbClr val="0F766E"/>
+            <a:pPr>
+              <a:lnSpc>
+                <a:spcPct val="115000"/>
+              </a:lnSpc>
+              <a:spcAft>
+                <a:spcPts val="1000"/>
+              </a:spcAft>
+            </a:pPr>
+            <a:r>
+              <a:rPr sz="1900" b="1" i="0">
+                <a:solidFill>
+                  <a:srgbClr val="1F2937"/>
                 </a:solidFill>
                 <a:latin typeface="Calibri"/>
               </a:rPr>
-              <a:t>PART 3</a:t>
-            </a:r>
-          </a:p>
-        </p:txBody>
-      </p:sp>
-      <p:sp>
-        <p:nvSpPr>
-          <p:cNvPr id="4" name="TextBox 3"/>
+              <a:t>•  For each of the ten, record one of:</a:t>
+            </a:r>
+          </a:p>
+          <a:p>
+            <a:pPr lvl="1">
+              <a:lnSpc>
+                <a:spcPct val="115000"/>
+              </a:lnSpc>
+              <a:spcAft>
+                <a:spcPts val="500"/>
+              </a:spcAft>
+            </a:pPr>
+            <a:r>
+              <a:rPr sz="1600" b="0" i="0">
+                <a:solidFill>
+                  <a:srgbClr val="333D4B"/>
+                </a:solidFill>
+                <a:latin typeface="Calibri"/>
+              </a:rPr>
+              <a:t>—  CORRECT — right answer, and the quotation genuinely supports it</a:t>
+            </a:r>
+          </a:p>
+          <a:p>
+            <a:pPr lvl="1">
+              <a:lnSpc>
+                <a:spcPct val="115000"/>
+              </a:lnSpc>
+              <a:spcAft>
+                <a:spcPts val="500"/>
+              </a:spcAft>
+            </a:pPr>
+            <a:r>
+              <a:rPr sz="1600" b="0" i="0">
+                <a:solidFill>
+                  <a:srgbClr val="333D4B"/>
+                </a:solidFill>
+                <a:latin typeface="Calibri"/>
+              </a:rPr>
+              <a:t>—  UNSUPPORTED — plausible answer, but no quotation, or a quotation that does not support it</a:t>
+            </a:r>
+          </a:p>
+          <a:p>
+            <a:pPr lvl="1">
+              <a:lnSpc>
+                <a:spcPct val="115000"/>
+              </a:lnSpc>
+              <a:spcAft>
+                <a:spcPts val="500"/>
+              </a:spcAft>
+            </a:pPr>
+            <a:r>
+              <a:rPr sz="1600" b="0" i="0">
+                <a:solidFill>
+                  <a:srgbClr val="333D4B"/>
+                </a:solidFill>
+                <a:latin typeface="Calibri"/>
+              </a:rPr>
+              <a:t>—  WRONG — the answer contradicts the source</a:t>
+            </a:r>
+          </a:p>
+          <a:p>
+            <a:pPr lvl="1">
+              <a:lnSpc>
+                <a:spcPct val="115000"/>
+              </a:lnSpc>
+              <a:spcAft>
+                <a:spcPts val="500"/>
+              </a:spcAft>
+            </a:pPr>
+            <a:r>
+              <a:rPr sz="1600" b="0" i="0">
+                <a:solidFill>
+                  <a:srgbClr val="333D4B"/>
+                </a:solidFill>
+                <a:latin typeface="Calibri"/>
+              </a:rPr>
+              <a:t>—  REFUSED — said NOT IN SOURCES</a:t>
+            </a:r>
+          </a:p>
+          <a:p>
+            <a:pPr>
+              <a:lnSpc>
+                <a:spcPct val="115000"/>
+              </a:lnSpc>
+              <a:spcAft>
+                <a:spcPts val="1000"/>
+              </a:spcAft>
+            </a:pPr>
+          </a:p>
+          <a:p>
+            <a:pPr>
+              <a:lnSpc>
+                <a:spcPct val="115000"/>
+              </a:lnSpc>
+              <a:spcAft>
+                <a:spcPts val="1000"/>
+              </a:spcAft>
+            </a:pPr>
+            <a:r>
+              <a:rPr sz="1900" b="1" i="0">
+                <a:solidFill>
+                  <a:srgbClr val="1F2937"/>
+                </a:solidFill>
+                <a:latin typeface="Calibri"/>
+              </a:rPr>
+              <a:t>•  Then read the pattern, not the score:</a:t>
+            </a:r>
+          </a:p>
+          <a:p>
+            <a:pPr lvl="1">
+              <a:lnSpc>
+                <a:spcPct val="115000"/>
+              </a:lnSpc>
+              <a:spcAft>
+                <a:spcPts val="500"/>
+              </a:spcAft>
+            </a:pPr>
+            <a:r>
+              <a:rPr sz="1600" b="0" i="0">
+                <a:solidFill>
+                  <a:srgbClr val="333D4B"/>
+                </a:solidFill>
+                <a:latin typeface="Calibri"/>
+              </a:rPr>
+              <a:t>—  REFUSED on all three unanswerable questions is the result you want</a:t>
+            </a:r>
+          </a:p>
+          <a:p>
+            <a:pPr lvl="1">
+              <a:lnSpc>
+                <a:spcPct val="115000"/>
+              </a:lnSpc>
+              <a:spcAft>
+                <a:spcPts val="500"/>
+              </a:spcAft>
+            </a:pPr>
+            <a:r>
+              <a:rPr sz="1600" b="0" i="0">
+                <a:solidFill>
+                  <a:srgbClr val="333D4B"/>
+                </a:solidFill>
+                <a:latin typeface="Calibri"/>
+              </a:rPr>
+              <a:t>—  UNSUPPORTED on any of the three is your headline finding — write it down</a:t>
+            </a:r>
+          </a:p>
+        </p:txBody>
+      </p:sp>
+      <p:sp>
+        <p:nvSpPr>
+          <p:cNvPr id="5" name="TextBox 4"/>
           <p:cNvSpPr txBox="1"/>
           <p:nvPr/>
         </p:nvSpPr>
         <p:spPr>
           <a:xfrm>
-            <a:off x="1280160" y="3200400"/>
-            <a:ext cx="10058400" cy="1097280"/>
+            <a:off x="777240" y="6355080"/>
+            <a:ext cx="10637215" cy="274320"/>
           </a:xfrm>
           <a:prstGeom prst="rect">
             <a:avLst/>
@@ -6695,13 +7658,48 @@
           <a:lstStyle/>
           <a:p>
             <a:r>
-              <a:rPr sz="3400" b="1" i="0">
-                <a:solidFill>
-                  <a:srgbClr val="1F2937"/>
-                </a:solidFill>
-                <a:latin typeface="Calibri Light"/>
-              </a:rPr>
-              <a:t>Build</a:t>
+              <a:rPr sz="1000" b="0" i="0">
+                <a:solidFill>
+                  <a:srgbClr val="6B7787"/>
+                </a:solidFill>
+                <a:latin typeface="Calibri"/>
+              </a:rPr>
+              <a:t>Week 8  ·  Prompt Engineering and Large Language Models</a:t>
+            </a:r>
+          </a:p>
+        </p:txBody>
+      </p:sp>
+      <p:sp>
+        <p:nvSpPr>
+          <p:cNvPr id="6" name="TextBox 5"/>
+          <p:cNvSpPr txBox="1"/>
+          <p:nvPr/>
+        </p:nvSpPr>
+        <p:spPr>
+          <a:xfrm>
+            <a:off x="10500055" y="6355080"/>
+            <a:ext cx="914400" cy="274320"/>
+          </a:xfrm>
+          <a:prstGeom prst="rect">
+            <a:avLst/>
+          </a:prstGeom>
+          <a:noFill/>
+        </p:spPr>
+        <p:txBody>
+          <a:bodyPr wrap="square" lIns="0" rIns="0" tIns="0" bIns="0">
+            <a:spAutoFit/>
+          </a:bodyPr>
+          <a:lstStyle/>
+          <a:p>
+            <a:pPr algn="r"/>
+            <a:r>
+              <a:rPr sz="1000" b="0" i="0">
+                <a:solidFill>
+                  <a:srgbClr val="6B7787"/>
+                </a:solidFill>
+                <a:latin typeface="Calibri"/>
+              </a:rPr>
+              <a:t>12</a:t>
             </a:r>
           </a:p>
         </p:txBody>
@@ -6733,7 +7731,7 @@
         <p:spPr>
           <a:xfrm>
             <a:off x="777240" y="566928"/>
-            <a:ext cx="10637215" cy="365760"/>
+            <a:ext cx="10637215" cy="822960"/>
           </a:xfrm>
           <a:prstGeom prst="rect">
             <a:avLst/>
@@ -6747,67 +7745,33 @@
           <a:lstStyle/>
           <a:p>
             <a:r>
-              <a:rPr sz="1300" b="1" i="0">
-                <a:solidFill>
-                  <a:srgbClr val="B45309"/>
-                </a:solidFill>
-                <a:latin typeface="Calibri"/>
-              </a:rPr>
-              <a:t>IN-CLASS ACTIVITY  ·  20 MINUTES</a:t>
-            </a:r>
-          </a:p>
-        </p:txBody>
-      </p:sp>
-      <p:sp>
-        <p:nvSpPr>
-          <p:cNvPr id="3" name="TextBox 2"/>
-          <p:cNvSpPr txBox="1"/>
-          <p:nvPr/>
-        </p:nvSpPr>
-        <p:spPr>
-          <a:xfrm>
-            <a:off x="777240" y="960120"/>
-            <a:ext cx="10637215" cy="731520"/>
+              <a:rPr sz="3000" b="1" i="0">
+                <a:solidFill>
+                  <a:srgbClr val="1F2937"/>
+                </a:solidFill>
+                <a:latin typeface="Calibri Light"/>
+              </a:rPr>
+              <a:t>Why Asking Twice Is Not Checking</a:t>
+            </a:r>
+          </a:p>
+        </p:txBody>
+      </p:sp>
+      <p:sp>
+        <p:nvSpPr>
+          <p:cNvPr id="3" name="Rectangle 2"/>
+          <p:cNvSpPr/>
+          <p:nvPr/>
+        </p:nvSpPr>
+        <p:spPr>
+          <a:xfrm>
+            <a:off x="777240" y="1417320"/>
+            <a:ext cx="1051560" cy="38100"/>
           </a:xfrm>
           <a:prstGeom prst="rect">
             <a:avLst/>
           </a:prstGeom>
-          <a:noFill/>
-        </p:spPr>
-        <p:txBody>
-          <a:bodyPr wrap="square" lIns="0" rIns="0" tIns="0" bIns="0">
-            <a:spAutoFit/>
-          </a:bodyPr>
-          <a:lstStyle/>
-          <a:p>
-            <a:r>
-              <a:rPr sz="3000" b="1" i="0">
-                <a:solidFill>
-                  <a:srgbClr val="1F2937"/>
-                </a:solidFill>
-                <a:latin typeface="Calibri Light"/>
-              </a:rPr>
-              <a:t>Build and Run Your Test Set</a:t>
-            </a:r>
-          </a:p>
-        </p:txBody>
-      </p:sp>
-      <p:sp>
-        <p:nvSpPr>
-          <p:cNvPr id="4" name="Rectangle 3"/>
-          <p:cNvSpPr/>
-          <p:nvPr/>
-        </p:nvSpPr>
-        <p:spPr>
-          <a:xfrm>
-            <a:off x="777240" y="1783080"/>
-            <a:ext cx="1051560" cy="38100"/>
-          </a:xfrm>
-          <a:prstGeom prst="rect">
-            <a:avLst/>
-          </a:prstGeom>
           <a:solidFill>
-            <a:srgbClr val="B45309"/>
+            <a:srgbClr val="0F766E"/>
           </a:solidFill>
           <a:ln>
             <a:noFill/>
@@ -6838,14 +7802,14 @@
       </p:sp>
       <p:sp>
         <p:nvSpPr>
-          <p:cNvPr id="5" name="TextBox 4"/>
+          <p:cNvPr id="4" name="TextBox 3"/>
           <p:cNvSpPr txBox="1"/>
           <p:nvPr/>
         </p:nvSpPr>
         <p:spPr>
           <a:xfrm>
-            <a:off x="777240" y="2148840"/>
-            <a:ext cx="10637215" cy="3931920"/>
+            <a:off x="777240" y="1783080"/>
+            <a:ext cx="10637215" cy="4343400"/>
           </a:xfrm>
           <a:prstGeom prst="rect">
             <a:avLst/>
@@ -6867,13 +7831,13 @@
               </a:spcAft>
             </a:pPr>
             <a:r>
-              <a:rPr sz="1900" b="1" i="0">
+              <a:rPr sz="1900" b="0" i="0">
                 <a:solidFill>
                   <a:srgbClr val="1F2937"/>
                 </a:solidFill>
                 <a:latin typeface="Calibri"/>
               </a:rPr>
-              <a:t>•  1.  Write seven questions your sources answer — two easy, three medium, two hard.</a:t>
+              <a:t>•  The most common informal verification method, and it does not work</a:t>
             </a:r>
           </a:p>
           <a:p>
@@ -6892,7 +7856,7 @@
                 </a:solidFill>
                 <a:latin typeface="Calibri"/>
               </a:rPr>
-              <a:t>—  Write the expected answer next to each one BEFORE you run anything.</a:t>
+              <a:t>—  You get an answer, feel unsure, ask again, get something similar, feel reassured</a:t>
             </a:r>
           </a:p>
           <a:p>
@@ -6904,6 +7868,16 @@
                 <a:spcPts val="1000"/>
               </a:spcAft>
             </a:pPr>
+          </a:p>
+          <a:p>
+            <a:pPr>
+              <a:lnSpc>
+                <a:spcPct val="115000"/>
+              </a:lnSpc>
+              <a:spcAft>
+                <a:spcPts val="1000"/>
+              </a:spcAft>
+            </a:pPr>
             <a:r>
               <a:rPr sz="1900" b="1" i="0">
                 <a:solidFill>
@@ -6911,7 +7885,7 @@
                 </a:solidFill>
                 <a:latin typeface="Calibri"/>
               </a:rPr>
-              <a:t>•  2.  Write three plausible questions your sources cannot answer.</a:t>
+              <a:t>•  What consistency actually measures:</a:t>
             </a:r>
           </a:p>
           <a:p>
@@ -6930,7 +7904,26 @@
                 </a:solidFill>
                 <a:latin typeface="Calibri"/>
               </a:rPr>
-              <a:t>—  Adjacent topic, different jurisdiction, a later year. Realistic, not absurd.</a:t>
+              <a:t>—  How strongly the pattern is represented in the training data — not whether it is true</a:t>
+            </a:r>
+          </a:p>
+          <a:p>
+            <a:pPr lvl="1">
+              <a:lnSpc>
+                <a:spcPct val="115000"/>
+              </a:lnSpc>
+              <a:spcAft>
+                <a:spcPts val="500"/>
+              </a:spcAft>
+            </a:pPr>
+            <a:r>
+              <a:rPr sz="1600" b="0" i="0">
+                <a:solidFill>
+                  <a:srgbClr val="333D4B"/>
+                </a:solidFill>
+                <a:latin typeface="Calibri"/>
+              </a:rPr>
+              <a:t>—  A widely repeated error is reproduced very consistently indeed</a:t>
             </a:r>
           </a:p>
           <a:p>
@@ -6942,15 +7935,6 @@
                 <a:spcPts val="1000"/>
               </a:spcAft>
             </a:pPr>
-            <a:r>
-              <a:rPr sz="1900" b="1" i="0">
-                <a:solidFill>
-                  <a:srgbClr val="1F2937"/>
-                </a:solidFill>
-                <a:latin typeface="Calibri"/>
-              </a:rPr>
-              <a:t>•  3.  Run all ten against your Week 7 assistant — or against mine.</a:t>
-            </a:r>
           </a:p>
           <a:p>
             <a:pPr>
@@ -6968,7 +7952,7 @@
                 </a:solidFill>
                 <a:latin typeface="Calibri"/>
               </a:rPr>
-              <a:t>•  4.  Grade each: CORRECT · UNSUPPORTED · WRONG · REFUSED.</a:t>
+              <a:t>•  What does work:</a:t>
             </a:r>
           </a:p>
           <a:p>
@@ -6987,14 +7971,33 @@
                 </a:solidFill>
                 <a:latin typeface="Calibri"/>
               </a:rPr>
-              <a:t>—  Then write one sentence describing how this system behaves when it does not know.</a:t>
-            </a:r>
-          </a:p>
-        </p:txBody>
-      </p:sp>
-      <p:sp>
-        <p:nvSpPr>
-          <p:cNvPr id="6" name="TextBox 5"/>
+              <a:t>—  Check against a source. Check against something you already know. Ask for the quotation and look it up.</a:t>
+            </a:r>
+          </a:p>
+          <a:p>
+            <a:pPr lvl="1">
+              <a:lnSpc>
+                <a:spcPct val="115000"/>
+              </a:lnSpc>
+              <a:spcAft>
+                <a:spcPts val="500"/>
+              </a:spcAft>
+            </a:pPr>
+            <a:r>
+              <a:rPr sz="1600" b="0" i="0">
+                <a:solidFill>
+                  <a:srgbClr val="333D4B"/>
+                </a:solidFill>
+                <a:latin typeface="Calibri"/>
+              </a:rPr>
+              <a:t>—  Asking a different model is slightly better than asking the same one twice — but they may share the same error.</a:t>
+            </a:r>
+          </a:p>
+        </p:txBody>
+      </p:sp>
+      <p:sp>
+        <p:nvSpPr>
+          <p:cNvPr id="5" name="TextBox 4"/>
           <p:cNvSpPr txBox="1"/>
           <p:nvPr/>
         </p:nvSpPr>
@@ -7028,7 +8031,7 @@
       </p:sp>
       <p:sp>
         <p:nvSpPr>
-          <p:cNvPr id="7" name="TextBox 6"/>
+          <p:cNvPr id="6" name="TextBox 5"/>
           <p:cNvSpPr txBox="1"/>
           <p:nvPr/>
         </p:nvSpPr>
@@ -7081,48 +8084,14 @@
       <p:grpSpPr/>
       <p:sp>
         <p:nvSpPr>
-          <p:cNvPr id="2" name="TextBox 1"/>
-          <p:cNvSpPr txBox="1"/>
-          <p:nvPr/>
-        </p:nvSpPr>
-        <p:spPr>
-          <a:xfrm>
-            <a:off x="777240" y="566928"/>
-            <a:ext cx="10637215" cy="822960"/>
-          </a:xfrm>
-          <a:prstGeom prst="rect">
-            <a:avLst/>
-          </a:prstGeom>
-          <a:noFill/>
-        </p:spPr>
-        <p:txBody>
-          <a:bodyPr wrap="square" lIns="0" rIns="0" tIns="0" bIns="0">
-            <a:spAutoFit/>
-          </a:bodyPr>
-          <a:lstStyle/>
-          <a:p>
-            <a:r>
-              <a:rPr sz="3000" b="1" i="0">
-                <a:solidFill>
-                  <a:srgbClr val="1F2937"/>
-                </a:solidFill>
-                <a:latin typeface="Calibri Light"/>
-              </a:rPr>
-              <a:t>What Almost Always Happens</a:t>
-            </a:r>
-          </a:p>
-        </p:txBody>
-      </p:sp>
-      <p:sp>
-        <p:nvSpPr>
-          <p:cNvPr id="3" name="Rectangle 2"/>
+          <p:cNvPr id="2" name="Rectangle 1"/>
           <p:cNvSpPr/>
           <p:nvPr/>
         </p:nvSpPr>
         <p:spPr>
           <a:xfrm>
-            <a:off x="777240" y="1417320"/>
-            <a:ext cx="1051560" cy="38100"/>
+            <a:off x="0" y="0"/>
+            <a:ext cx="292608" cy="6858000"/>
           </a:xfrm>
           <a:prstGeom prst="rect">
             <a:avLst/>
@@ -7159,542 +8128,14 @@
       </p:sp>
       <p:sp>
         <p:nvSpPr>
-          <p:cNvPr id="4" name="Rounded Rectangle 3"/>
-          <p:cNvSpPr/>
-          <p:nvPr/>
-        </p:nvSpPr>
-        <p:spPr>
-          <a:xfrm>
-            <a:off x="777240" y="2057400"/>
-            <a:ext cx="3301898" cy="3200400"/>
-          </a:xfrm>
-          <a:prstGeom prst="roundRect">
-            <a:avLst>
-              <a:gd name="adj" fmla="val 10000"/>
-            </a:avLst>
-          </a:prstGeom>
-          <a:solidFill>
-            <a:srgbClr val="F1F5F9"/>
-          </a:solidFill>
-          <a:ln w="15875">
-            <a:solidFill>
-              <a:srgbClr val="D3DDE6"/>
-            </a:solidFill>
-          </a:ln>
-          <a:effectLst/>
-        </p:spPr>
-        <p:style>
-          <a:lnRef idx="1">
-            <a:schemeClr val="accent1"/>
-          </a:lnRef>
-          <a:fillRef idx="3">
-            <a:schemeClr val="accent1"/>
-          </a:fillRef>
-          <a:effectRef idx="2">
-            <a:schemeClr val="accent1"/>
-          </a:effectRef>
-          <a:fontRef idx="minor">
-            <a:schemeClr val="lt1"/>
-          </a:fontRef>
-        </p:style>
-        <p:txBody>
-          <a:bodyPr rtlCol="0" anchor="ctr"/>
-          <a:lstStyle/>
-          <a:p>
-            <a:pPr algn="ctr"/>
-          </a:p>
-        </p:txBody>
-      </p:sp>
-      <p:sp>
-        <p:nvSpPr>
-          <p:cNvPr id="5" name="Rectangle 4"/>
-          <p:cNvSpPr/>
-          <p:nvPr/>
-        </p:nvSpPr>
-        <p:spPr>
-          <a:xfrm>
-            <a:off x="978408" y="2331720"/>
-            <a:ext cx="640080" cy="38100"/>
-          </a:xfrm>
-          <a:prstGeom prst="rect">
-            <a:avLst/>
-          </a:prstGeom>
-          <a:solidFill>
-            <a:srgbClr val="0F766E"/>
-          </a:solidFill>
-          <a:ln>
-            <a:noFill/>
-          </a:ln>
-          <a:effectLst/>
-        </p:spPr>
-        <p:style>
-          <a:lnRef idx="1">
-            <a:schemeClr val="accent1"/>
-          </a:lnRef>
-          <a:fillRef idx="3">
-            <a:schemeClr val="accent1"/>
-          </a:fillRef>
-          <a:effectRef idx="2">
-            <a:schemeClr val="accent1"/>
-          </a:effectRef>
-          <a:fontRef idx="minor">
-            <a:schemeClr val="lt1"/>
-          </a:fontRef>
-        </p:style>
-        <p:txBody>
-          <a:bodyPr rtlCol="0" anchor="ctr"/>
-          <a:lstStyle/>
-          <a:p>
-            <a:pPr algn="ctr"/>
-          </a:p>
-        </p:txBody>
-      </p:sp>
-      <p:sp>
-        <p:nvSpPr>
-          <p:cNvPr id="6" name="TextBox 5"/>
+          <p:cNvPr id="3" name="TextBox 2"/>
           <p:cNvSpPr txBox="1"/>
           <p:nvPr/>
         </p:nvSpPr>
         <p:spPr>
           <a:xfrm>
-            <a:off x="978408" y="2560320"/>
-            <a:ext cx="2899562" cy="640080"/>
-          </a:xfrm>
-          <a:prstGeom prst="rect">
-            <a:avLst/>
-          </a:prstGeom>
-          <a:noFill/>
-        </p:spPr>
-        <p:txBody>
-          <a:bodyPr wrap="square" lIns="0" rIns="0" tIns="0" bIns="0" anchor="t">
-            <a:spAutoFit/>
-          </a:bodyPr>
-          <a:lstStyle/>
-          <a:p>
-            <a:pPr algn="l">
-              <a:lnSpc>
-                <a:spcPct val="105000"/>
-              </a:lnSpc>
-              <a:spcAft>
-                <a:spcPts val="200"/>
-              </a:spcAft>
-            </a:pPr>
-            <a:r>
-              <a:rPr sz="1800" b="1" i="0">
-                <a:solidFill>
-                  <a:srgbClr val="1F2937"/>
-                </a:solidFill>
-                <a:latin typeface="Calibri"/>
-              </a:rPr>
-              <a:t>It answers at least one unanswerable question</a:t>
-            </a:r>
-          </a:p>
-        </p:txBody>
-      </p:sp>
-      <p:sp>
-        <p:nvSpPr>
-          <p:cNvPr id="7" name="TextBox 6"/>
-          <p:cNvSpPr txBox="1"/>
-          <p:nvPr/>
-        </p:nvSpPr>
-        <p:spPr>
-          <a:xfrm>
-            <a:off x="978408" y="3246120"/>
-            <a:ext cx="2899562" cy="1737360"/>
-          </a:xfrm>
-          <a:prstGeom prst="rect">
-            <a:avLst/>
-          </a:prstGeom>
-          <a:noFill/>
-        </p:spPr>
-        <p:txBody>
-          <a:bodyPr wrap="square" lIns="0" rIns="0" tIns="0" bIns="0" anchor="t">
-            <a:spAutoFit/>
-          </a:bodyPr>
-          <a:lstStyle/>
-          <a:p>
-            <a:pPr algn="l">
-              <a:lnSpc>
-                <a:spcPct val="105000"/>
-              </a:lnSpc>
-              <a:spcAft>
-                <a:spcPts val="200"/>
-              </a:spcAft>
-            </a:pPr>
-            <a:r>
-              <a:rPr sz="1350" b="0" i="0">
-                <a:solidFill>
-                  <a:srgbClr val="333D4B"/>
-                </a:solidFill>
-                <a:latin typeface="Calibri"/>
-              </a:rPr>
-              <a:t>Usually with something reasonable-sounding drawn from general knowledge, sometimes with a hedge attached. This is the mechanism from Week 3, on your own system, in front of you.</a:t>
-            </a:r>
-          </a:p>
-        </p:txBody>
-      </p:sp>
-      <p:sp>
-        <p:nvSpPr>
-          <p:cNvPr id="8" name="Rounded Rectangle 7"/>
-          <p:cNvSpPr/>
-          <p:nvPr/>
-        </p:nvSpPr>
-        <p:spPr>
-          <a:xfrm>
-            <a:off x="4444898" y="2057400"/>
-            <a:ext cx="3301898" cy="3200400"/>
-          </a:xfrm>
-          <a:prstGeom prst="roundRect">
-            <a:avLst>
-              <a:gd name="adj" fmla="val 10000"/>
-            </a:avLst>
-          </a:prstGeom>
-          <a:solidFill>
-            <a:srgbClr val="F1F5F9"/>
-          </a:solidFill>
-          <a:ln w="15875">
-            <a:solidFill>
-              <a:srgbClr val="D3DDE6"/>
-            </a:solidFill>
-          </a:ln>
-          <a:effectLst/>
-        </p:spPr>
-        <p:style>
-          <a:lnRef idx="1">
-            <a:schemeClr val="accent1"/>
-          </a:lnRef>
-          <a:fillRef idx="3">
-            <a:schemeClr val="accent1"/>
-          </a:fillRef>
-          <a:effectRef idx="2">
-            <a:schemeClr val="accent1"/>
-          </a:effectRef>
-          <a:fontRef idx="minor">
-            <a:schemeClr val="lt1"/>
-          </a:fontRef>
-        </p:style>
-        <p:txBody>
-          <a:bodyPr rtlCol="0" anchor="ctr"/>
-          <a:lstStyle/>
-          <a:p>
-            <a:pPr algn="ctr"/>
-          </a:p>
-        </p:txBody>
-      </p:sp>
-      <p:sp>
-        <p:nvSpPr>
-          <p:cNvPr id="9" name="Rectangle 8"/>
-          <p:cNvSpPr/>
-          <p:nvPr/>
-        </p:nvSpPr>
-        <p:spPr>
-          <a:xfrm>
-            <a:off x="4646066" y="2331720"/>
-            <a:ext cx="640080" cy="38100"/>
-          </a:xfrm>
-          <a:prstGeom prst="rect">
-            <a:avLst/>
-          </a:prstGeom>
-          <a:solidFill>
-            <a:srgbClr val="0F766E"/>
-          </a:solidFill>
-          <a:ln>
-            <a:noFill/>
-          </a:ln>
-          <a:effectLst/>
-        </p:spPr>
-        <p:style>
-          <a:lnRef idx="1">
-            <a:schemeClr val="accent1"/>
-          </a:lnRef>
-          <a:fillRef idx="3">
-            <a:schemeClr val="accent1"/>
-          </a:fillRef>
-          <a:effectRef idx="2">
-            <a:schemeClr val="accent1"/>
-          </a:effectRef>
-          <a:fontRef idx="minor">
-            <a:schemeClr val="lt1"/>
-          </a:fontRef>
-        </p:style>
-        <p:txBody>
-          <a:bodyPr rtlCol="0" anchor="ctr"/>
-          <a:lstStyle/>
-          <a:p>
-            <a:pPr algn="ctr"/>
-          </a:p>
-        </p:txBody>
-      </p:sp>
-      <p:sp>
-        <p:nvSpPr>
-          <p:cNvPr id="10" name="TextBox 9"/>
-          <p:cNvSpPr txBox="1"/>
-          <p:nvPr/>
-        </p:nvSpPr>
-        <p:spPr>
-          <a:xfrm>
-            <a:off x="4646066" y="2560320"/>
-            <a:ext cx="2899562" cy="640080"/>
-          </a:xfrm>
-          <a:prstGeom prst="rect">
-            <a:avLst/>
-          </a:prstGeom>
-          <a:noFill/>
-        </p:spPr>
-        <p:txBody>
-          <a:bodyPr wrap="square" lIns="0" rIns="0" tIns="0" bIns="0" anchor="t">
-            <a:spAutoFit/>
-          </a:bodyPr>
-          <a:lstStyle/>
-          <a:p>
-            <a:pPr algn="l">
-              <a:lnSpc>
-                <a:spcPct val="105000"/>
-              </a:lnSpc>
-              <a:spcAft>
-                <a:spcPts val="200"/>
-              </a:spcAft>
-            </a:pPr>
-            <a:r>
-              <a:rPr sz="1800" b="1" i="0">
-                <a:solidFill>
-                  <a:srgbClr val="1F2937"/>
-                </a:solidFill>
-                <a:latin typeface="Calibri"/>
-              </a:rPr>
-              <a:t>The hard questions expose retrieval, not reasoning</a:t>
-            </a:r>
-          </a:p>
-        </p:txBody>
-      </p:sp>
-      <p:sp>
-        <p:nvSpPr>
-          <p:cNvPr id="11" name="TextBox 10"/>
-          <p:cNvSpPr txBox="1"/>
-          <p:nvPr/>
-        </p:nvSpPr>
-        <p:spPr>
-          <a:xfrm>
-            <a:off x="4646066" y="3246120"/>
-            <a:ext cx="2899562" cy="1737360"/>
-          </a:xfrm>
-          <a:prstGeom prst="rect">
-            <a:avLst/>
-          </a:prstGeom>
-          <a:noFill/>
-        </p:spPr>
-        <p:txBody>
-          <a:bodyPr wrap="square" lIns="0" rIns="0" tIns="0" bIns="0" anchor="t">
-            <a:spAutoFit/>
-          </a:bodyPr>
-          <a:lstStyle/>
-          <a:p>
-            <a:pPr algn="l">
-              <a:lnSpc>
-                <a:spcPct val="105000"/>
-              </a:lnSpc>
-              <a:spcAft>
-                <a:spcPts val="200"/>
-              </a:spcAft>
-            </a:pPr>
-            <a:r>
-              <a:rPr sz="1350" b="0" i="0">
-                <a:solidFill>
-                  <a:srgbClr val="333D4B"/>
-                </a:solidFill>
-                <a:latin typeface="Calibri"/>
-              </a:rPr>
-              <a:t>Failures cluster on answers spread across sections, stated as exceptions, or held in tables. It did not reason badly — it never saw the right passage.</a:t>
-            </a:r>
-          </a:p>
-        </p:txBody>
-      </p:sp>
-      <p:sp>
-        <p:nvSpPr>
-          <p:cNvPr id="12" name="Rounded Rectangle 11"/>
-          <p:cNvSpPr/>
-          <p:nvPr/>
-        </p:nvSpPr>
-        <p:spPr>
-          <a:xfrm>
-            <a:off x="8112556" y="2057400"/>
-            <a:ext cx="3301898" cy="3200400"/>
-          </a:xfrm>
-          <a:prstGeom prst="roundRect">
-            <a:avLst>
-              <a:gd name="adj" fmla="val 10000"/>
-            </a:avLst>
-          </a:prstGeom>
-          <a:solidFill>
-            <a:srgbClr val="F1F5F9"/>
-          </a:solidFill>
-          <a:ln w="15875">
-            <a:solidFill>
-              <a:srgbClr val="D3DDE6"/>
-            </a:solidFill>
-          </a:ln>
-          <a:effectLst/>
-        </p:spPr>
-        <p:style>
-          <a:lnRef idx="1">
-            <a:schemeClr val="accent1"/>
-          </a:lnRef>
-          <a:fillRef idx="3">
-            <a:schemeClr val="accent1"/>
-          </a:fillRef>
-          <a:effectRef idx="2">
-            <a:schemeClr val="accent1"/>
-          </a:effectRef>
-          <a:fontRef idx="minor">
-            <a:schemeClr val="lt1"/>
-          </a:fontRef>
-        </p:style>
-        <p:txBody>
-          <a:bodyPr rtlCol="0" anchor="ctr"/>
-          <a:lstStyle/>
-          <a:p>
-            <a:pPr algn="ctr"/>
-          </a:p>
-        </p:txBody>
-      </p:sp>
-      <p:sp>
-        <p:nvSpPr>
-          <p:cNvPr id="13" name="Rectangle 12"/>
-          <p:cNvSpPr/>
-          <p:nvPr/>
-        </p:nvSpPr>
-        <p:spPr>
-          <a:xfrm>
-            <a:off x="8313724" y="2331720"/>
-            <a:ext cx="640080" cy="38100"/>
-          </a:xfrm>
-          <a:prstGeom prst="rect">
-            <a:avLst/>
-          </a:prstGeom>
-          <a:solidFill>
-            <a:srgbClr val="0F766E"/>
-          </a:solidFill>
-          <a:ln>
-            <a:noFill/>
-          </a:ln>
-          <a:effectLst/>
-        </p:spPr>
-        <p:style>
-          <a:lnRef idx="1">
-            <a:schemeClr val="accent1"/>
-          </a:lnRef>
-          <a:fillRef idx="3">
-            <a:schemeClr val="accent1"/>
-          </a:fillRef>
-          <a:effectRef idx="2">
-            <a:schemeClr val="accent1"/>
-          </a:effectRef>
-          <a:fontRef idx="minor">
-            <a:schemeClr val="lt1"/>
-          </a:fontRef>
-        </p:style>
-        <p:txBody>
-          <a:bodyPr rtlCol="0" anchor="ctr"/>
-          <a:lstStyle/>
-          <a:p>
-            <a:pPr algn="ctr"/>
-          </a:p>
-        </p:txBody>
-      </p:sp>
-      <p:sp>
-        <p:nvSpPr>
-          <p:cNvPr id="14" name="TextBox 13"/>
-          <p:cNvSpPr txBox="1"/>
-          <p:nvPr/>
-        </p:nvSpPr>
-        <p:spPr>
-          <a:xfrm>
-            <a:off x="8313724" y="2560320"/>
-            <a:ext cx="2899562" cy="640080"/>
-          </a:xfrm>
-          <a:prstGeom prst="rect">
-            <a:avLst/>
-          </a:prstGeom>
-          <a:noFill/>
-        </p:spPr>
-        <p:txBody>
-          <a:bodyPr wrap="square" lIns="0" rIns="0" tIns="0" bIns="0" anchor="t">
-            <a:spAutoFit/>
-          </a:bodyPr>
-          <a:lstStyle/>
-          <a:p>
-            <a:pPr algn="l">
-              <a:lnSpc>
-                <a:spcPct val="105000"/>
-              </a:lnSpc>
-              <a:spcAft>
-                <a:spcPts val="200"/>
-              </a:spcAft>
-            </a:pPr>
-            <a:r>
-              <a:rPr sz="1800" b="1" i="0">
-                <a:solidFill>
-                  <a:srgbClr val="1F2937"/>
-                </a:solidFill>
-                <a:latin typeface="Calibri"/>
-              </a:rPr>
-              <a:t>Over-reading is the most common wrong answer</a:t>
-            </a:r>
-          </a:p>
-        </p:txBody>
-      </p:sp>
-      <p:sp>
-        <p:nvSpPr>
-          <p:cNvPr id="15" name="TextBox 14"/>
-          <p:cNvSpPr txBox="1"/>
-          <p:nvPr/>
-        </p:nvSpPr>
-        <p:spPr>
-          <a:xfrm>
-            <a:off x="8313724" y="3246120"/>
-            <a:ext cx="2899562" cy="1737360"/>
-          </a:xfrm>
-          <a:prstGeom prst="rect">
-            <a:avLst/>
-          </a:prstGeom>
-          <a:noFill/>
-        </p:spPr>
-        <p:txBody>
-          <a:bodyPr wrap="square" lIns="0" rIns="0" tIns="0" bIns="0" anchor="t">
-            <a:spAutoFit/>
-          </a:bodyPr>
-          <a:lstStyle/>
-          <a:p>
-            <a:pPr algn="l">
-              <a:lnSpc>
-                <a:spcPct val="105000"/>
-              </a:lnSpc>
-              <a:spcAft>
-                <a:spcPts val="200"/>
-              </a:spcAft>
-            </a:pPr>
-            <a:r>
-              <a:rPr sz="1350" b="0" i="0">
-                <a:solidFill>
-                  <a:srgbClr val="333D4B"/>
-                </a:solidFill>
-                <a:latin typeface="Calibri"/>
-              </a:rPr>
-              <a:t>The claim is stronger than the quoted sentence supports. "May" becomes "must"; a specific case becomes a general rule.</a:t>
-            </a:r>
-          </a:p>
-        </p:txBody>
-      </p:sp>
-      <p:sp>
-        <p:nvSpPr>
-          <p:cNvPr id="16" name="TextBox 15"/>
-          <p:cNvSpPr txBox="1"/>
-          <p:nvPr/>
-        </p:nvSpPr>
-        <p:spPr>
-          <a:xfrm>
-            <a:off x="777240" y="6355080"/>
-            <a:ext cx="10637215" cy="274320"/>
+            <a:off x="1280160" y="2743200"/>
+            <a:ext cx="10058400" cy="457200"/>
           </a:xfrm>
           <a:prstGeom prst="rect">
             <a:avLst/>
@@ -7708,27 +8149,27 @@
           <a:lstStyle/>
           <a:p>
             <a:r>
-              <a:rPr sz="1000" b="0" i="0">
-                <a:solidFill>
-                  <a:srgbClr val="6B7787"/>
+              <a:rPr sz="1400" b="1" i="0">
+                <a:solidFill>
+                  <a:srgbClr val="0F766E"/>
                 </a:solidFill>
                 <a:latin typeface="Calibri"/>
               </a:rPr>
-              <a:t>Week 8  ·  Prompt Engineering and Large Language Models</a:t>
-            </a:r>
-          </a:p>
-        </p:txBody>
-      </p:sp>
-      <p:sp>
-        <p:nvSpPr>
-          <p:cNvPr id="17" name="TextBox 16"/>
+              <a:t>PART 3</a:t>
+            </a:r>
+          </a:p>
+        </p:txBody>
+      </p:sp>
+      <p:sp>
+        <p:nvSpPr>
+          <p:cNvPr id="4" name="TextBox 3"/>
           <p:cNvSpPr txBox="1"/>
           <p:nvPr/>
         </p:nvSpPr>
         <p:spPr>
           <a:xfrm>
-            <a:off x="10500055" y="6355080"/>
-            <a:ext cx="914400" cy="274320"/>
+            <a:off x="1280160" y="3200400"/>
+            <a:ext cx="10058400" cy="1097280"/>
           </a:xfrm>
           <a:prstGeom prst="rect">
             <a:avLst/>
@@ -7741,15 +8182,14 @@
           </a:bodyPr>
           <a:lstStyle/>
           <a:p>
-            <a:pPr algn="r"/>
-            <a:r>
-              <a:rPr sz="1000" b="0" i="0">
-                <a:solidFill>
-                  <a:srgbClr val="6B7787"/>
-                </a:solidFill>
-                <a:latin typeface="Calibri"/>
-              </a:rPr>
-              <a:t>14</a:t>
+            <a:r>
+              <a:rPr sz="3400" b="1" i="0">
+                <a:solidFill>
+                  <a:srgbClr val="1F2937"/>
+                </a:solidFill>
+                <a:latin typeface="Calibri Light"/>
+              </a:rPr>
+              <a:t>Build</a:t>
             </a:r>
           </a:p>
         </p:txBody>
@@ -7781,7 +8221,7 @@
         <p:spPr>
           <a:xfrm>
             <a:off x="777240" y="566928"/>
-            <a:ext cx="10637215" cy="822960"/>
+            <a:ext cx="10637215" cy="365760"/>
           </a:xfrm>
           <a:prstGeom prst="rect">
             <a:avLst/>
@@ -7795,33 +8235,67 @@
           <a:lstStyle/>
           <a:p>
             <a:r>
+              <a:rPr sz="1300" b="1" i="0">
+                <a:solidFill>
+                  <a:srgbClr val="B45309"/>
+                </a:solidFill>
+                <a:latin typeface="Calibri"/>
+              </a:rPr>
+              <a:t>IN-CLASS ACTIVITY  ·  20 MINUTES</a:t>
+            </a:r>
+          </a:p>
+        </p:txBody>
+      </p:sp>
+      <p:sp>
+        <p:nvSpPr>
+          <p:cNvPr id="3" name="TextBox 2"/>
+          <p:cNvSpPr txBox="1"/>
+          <p:nvPr/>
+        </p:nvSpPr>
+        <p:spPr>
+          <a:xfrm>
+            <a:off x="777240" y="960120"/>
+            <a:ext cx="10637215" cy="731520"/>
+          </a:xfrm>
+          <a:prstGeom prst="rect">
+            <a:avLst/>
+          </a:prstGeom>
+          <a:noFill/>
+        </p:spPr>
+        <p:txBody>
+          <a:bodyPr wrap="square" lIns="0" rIns="0" tIns="0" bIns="0">
+            <a:spAutoFit/>
+          </a:bodyPr>
+          <a:lstStyle/>
+          <a:p>
+            <a:r>
               <a:rPr sz="3000" b="1" i="0">
                 <a:solidFill>
                   <a:srgbClr val="1F2937"/>
                 </a:solidFill>
                 <a:latin typeface="Calibri Light"/>
               </a:rPr>
-              <a:t>Concepts You Must Be Able to Define and Diagnose</a:t>
-            </a:r>
-          </a:p>
-        </p:txBody>
-      </p:sp>
-      <p:sp>
-        <p:nvSpPr>
-          <p:cNvPr id="3" name="Rectangle 2"/>
+              <a:t>Build and Run Your Test Set</a:t>
+            </a:r>
+          </a:p>
+        </p:txBody>
+      </p:sp>
+      <p:sp>
+        <p:nvSpPr>
+          <p:cNvPr id="4" name="Rectangle 3"/>
           <p:cNvSpPr/>
           <p:nvPr/>
         </p:nvSpPr>
         <p:spPr>
           <a:xfrm>
-            <a:off x="777240" y="1417320"/>
+            <a:off x="777240" y="1783080"/>
             <a:ext cx="1051560" cy="38100"/>
           </a:xfrm>
           <a:prstGeom prst="rect">
             <a:avLst/>
           </a:prstGeom>
           <a:solidFill>
-            <a:srgbClr val="0F766E"/>
+            <a:srgbClr val="B45309"/>
           </a:solidFill>
           <a:ln>
             <a:noFill/>
@@ -7852,58 +8326,14 @@
       </p:sp>
       <p:sp>
         <p:nvSpPr>
-          <p:cNvPr id="4" name="Rectangle 3"/>
-          <p:cNvSpPr/>
-          <p:nvPr/>
-        </p:nvSpPr>
-        <p:spPr>
-          <a:xfrm>
-            <a:off x="777240" y="1783080"/>
-            <a:ext cx="10637215" cy="4251960"/>
-          </a:xfrm>
-          <a:prstGeom prst="rect">
-            <a:avLst/>
-          </a:prstGeom>
-          <a:solidFill>
-            <a:srgbClr val="F1F5F9"/>
-          </a:solidFill>
-          <a:ln>
-            <a:noFill/>
-          </a:ln>
-          <a:effectLst/>
-        </p:spPr>
-        <p:style>
-          <a:lnRef idx="1">
-            <a:schemeClr val="accent1"/>
-          </a:lnRef>
-          <a:fillRef idx="3">
-            <a:schemeClr val="accent1"/>
-          </a:fillRef>
-          <a:effectRef idx="2">
-            <a:schemeClr val="accent1"/>
-          </a:effectRef>
-          <a:fontRef idx="minor">
-            <a:schemeClr val="lt1"/>
-          </a:fontRef>
-        </p:style>
-        <p:txBody>
-          <a:bodyPr rtlCol="0" anchor="ctr"/>
-          <a:lstStyle/>
-          <a:p>
-            <a:pPr algn="ctr"/>
-          </a:p>
-        </p:txBody>
-      </p:sp>
-      <p:sp>
-        <p:nvSpPr>
           <p:cNvPr id="5" name="TextBox 4"/>
           <p:cNvSpPr txBox="1"/>
           <p:nvPr/>
         </p:nvSpPr>
         <p:spPr>
           <a:xfrm>
-            <a:off x="1188720" y="2103120"/>
-            <a:ext cx="9814255" cy="3611880"/>
+            <a:off x="777240" y="2148840"/>
+            <a:ext cx="10637215" cy="3931920"/>
           </a:xfrm>
           <a:prstGeom prst="rect">
             <a:avLst/>
@@ -7931,7 +8361,7 @@
                 </a:solidFill>
                 <a:latin typeface="Calibri"/>
               </a:rPr>
-              <a:t>•  The verification gap</a:t>
+              <a:t>•  1.  Write seven questions your sources answer — two easy, three medium, two hard.</a:t>
             </a:r>
           </a:p>
           <a:p>
@@ -7950,7 +8380,7 @@
                 </a:solidFill>
                 <a:latin typeface="Calibri"/>
               </a:rPr>
-              <a:t>—  Generating is fast, checking is slow, and the gap widens as output quality rises.</a:t>
+              <a:t>—  Write the expected answer next to each one BEFORE you run anything.</a:t>
             </a:r>
           </a:p>
           <a:p>
@@ -7969,7 +8399,7 @@
                 </a:solidFill>
                 <a:latin typeface="Calibri"/>
               </a:rPr>
-              <a:t>•  Test set structure</a:t>
+              <a:t>•  2.  Write three plausible questions your sources cannot answer.</a:t>
             </a:r>
           </a:p>
           <a:p>
@@ -7988,7 +8418,7 @@
                 </a:solidFill>
                 <a:latin typeface="Calibri"/>
               </a:rPr>
-              <a:t>—  Seven answerable, graded easy/medium/hard, plus three plausible unanswerable ones. Expected answers written before running.</a:t>
+              <a:t>—  Adjacent topic, different jurisdiction, a later year. Realistic, not absurd.</a:t>
             </a:r>
           </a:p>
           <a:p>
@@ -8007,7 +8437,26 @@
                 </a:solidFill>
                 <a:latin typeface="Calibri"/>
               </a:rPr>
-              <a:t>•  Why the unanswerable questions matter most</a:t>
+              <a:t>•  3.  Run all ten against your Week 7 assistant — or against mine.</a:t>
+            </a:r>
+          </a:p>
+          <a:p>
+            <a:pPr>
+              <a:lnSpc>
+                <a:spcPct val="115000"/>
+              </a:lnSpc>
+              <a:spcAft>
+                <a:spcPts val="1000"/>
+              </a:spcAft>
+            </a:pPr>
+            <a:r>
+              <a:rPr sz="1900" b="1" i="0">
+                <a:solidFill>
+                  <a:srgbClr val="1F2937"/>
+                </a:solidFill>
+                <a:latin typeface="Calibri"/>
+              </a:rPr>
+              <a:t>•  4.  Grade each: CORRECT · UNSUPPORTED · WRONG · REFUSED.</a:t>
             </a:r>
           </a:p>
           <a:p>
@@ -8026,83 +8475,7 @@
                 </a:solidFill>
                 <a:latin typeface="Calibri"/>
               </a:rPr>
-              <a:t>—  They test behaviour when the system does not know — the situation you cannot detect in normal use.</a:t>
-            </a:r>
-          </a:p>
-          <a:p>
-            <a:pPr>
-              <a:lnSpc>
-                <a:spcPct val="115000"/>
-              </a:lnSpc>
-              <a:spcAft>
-                <a:spcPts val="1000"/>
-              </a:spcAft>
-            </a:pPr>
-            <a:r>
-              <a:rPr sz="1900" b="1" i="0">
-                <a:solidFill>
-                  <a:srgbClr val="1F2937"/>
-                </a:solidFill>
-                <a:latin typeface="Calibri"/>
-              </a:rPr>
-              <a:t>•  Grading</a:t>
-            </a:r>
-          </a:p>
-          <a:p>
-            <a:pPr lvl="1">
-              <a:lnSpc>
-                <a:spcPct val="115000"/>
-              </a:lnSpc>
-              <a:spcAft>
-                <a:spcPts val="500"/>
-              </a:spcAft>
-            </a:pPr>
-            <a:r>
-              <a:rPr sz="1600" b="0" i="0">
-                <a:solidFill>
-                  <a:srgbClr val="333D4B"/>
-                </a:solidFill>
-                <a:latin typeface="Calibri"/>
-              </a:rPr>
-              <a:t>—  CORRECT · UNSUPPORTED · WRONG · REFUSED. Read the pattern, not the score.</a:t>
-            </a:r>
-          </a:p>
-          <a:p>
-            <a:pPr>
-              <a:lnSpc>
-                <a:spcPct val="115000"/>
-              </a:lnSpc>
-              <a:spcAft>
-                <a:spcPts val="1000"/>
-              </a:spcAft>
-            </a:pPr>
-            <a:r>
-              <a:rPr sz="1900" b="1" i="0">
-                <a:solidFill>
-                  <a:srgbClr val="1F2937"/>
-                </a:solidFill>
-                <a:latin typeface="Calibri"/>
-              </a:rPr>
-              <a:t>•  Consistency is not correctness</a:t>
-            </a:r>
-          </a:p>
-          <a:p>
-            <a:pPr lvl="1">
-              <a:lnSpc>
-                <a:spcPct val="115000"/>
-              </a:lnSpc>
-              <a:spcAft>
-                <a:spcPts val="500"/>
-              </a:spcAft>
-            </a:pPr>
-            <a:r>
-              <a:rPr sz="1600" b="0" i="0">
-                <a:solidFill>
-                  <a:srgbClr val="333D4B"/>
-                </a:solidFill>
-                <a:latin typeface="Calibri"/>
-              </a:rPr>
-              <a:t>—  Repeating a question measures how common the pattern is, not whether it is true. Verification needs something outside the system.</a:t>
+              <a:t>—  Then write one sentence describing how this system behaves when it does not know.</a:t>
             </a:r>
           </a:p>
         </p:txBody>
@@ -8223,7 +8596,7 @@
                 </a:solidFill>
                 <a:latin typeface="Calibri Light"/>
               </a:rPr>
-              <a:t>Wrap-Up</a:t>
+              <a:t>What Almost Always Happens</a:t>
             </a:r>
           </a:p>
         </p:txBody>
@@ -8274,14 +8647,542 @@
       </p:sp>
       <p:sp>
         <p:nvSpPr>
-          <p:cNvPr id="4" name="TextBox 3"/>
+          <p:cNvPr id="4" name="Rounded Rectangle 3"/>
+          <p:cNvSpPr/>
+          <p:nvPr/>
+        </p:nvSpPr>
+        <p:spPr>
+          <a:xfrm>
+            <a:off x="777240" y="2057400"/>
+            <a:ext cx="3301898" cy="3200400"/>
+          </a:xfrm>
+          <a:prstGeom prst="roundRect">
+            <a:avLst>
+              <a:gd name="adj" fmla="val 10000"/>
+            </a:avLst>
+          </a:prstGeom>
+          <a:solidFill>
+            <a:srgbClr val="F1F5F9"/>
+          </a:solidFill>
+          <a:ln w="15875">
+            <a:solidFill>
+              <a:srgbClr val="D3DDE6"/>
+            </a:solidFill>
+          </a:ln>
+          <a:effectLst/>
+        </p:spPr>
+        <p:style>
+          <a:lnRef idx="1">
+            <a:schemeClr val="accent1"/>
+          </a:lnRef>
+          <a:fillRef idx="3">
+            <a:schemeClr val="accent1"/>
+          </a:fillRef>
+          <a:effectRef idx="2">
+            <a:schemeClr val="accent1"/>
+          </a:effectRef>
+          <a:fontRef idx="minor">
+            <a:schemeClr val="lt1"/>
+          </a:fontRef>
+        </p:style>
+        <p:txBody>
+          <a:bodyPr rtlCol="0" anchor="ctr"/>
+          <a:lstStyle/>
+          <a:p>
+            <a:pPr algn="ctr"/>
+          </a:p>
+        </p:txBody>
+      </p:sp>
+      <p:sp>
+        <p:nvSpPr>
+          <p:cNvPr id="5" name="Rectangle 4"/>
+          <p:cNvSpPr/>
+          <p:nvPr/>
+        </p:nvSpPr>
+        <p:spPr>
+          <a:xfrm>
+            <a:off x="978408" y="2331720"/>
+            <a:ext cx="640080" cy="38100"/>
+          </a:xfrm>
+          <a:prstGeom prst="rect">
+            <a:avLst/>
+          </a:prstGeom>
+          <a:solidFill>
+            <a:srgbClr val="0F766E"/>
+          </a:solidFill>
+          <a:ln>
+            <a:noFill/>
+          </a:ln>
+          <a:effectLst/>
+        </p:spPr>
+        <p:style>
+          <a:lnRef idx="1">
+            <a:schemeClr val="accent1"/>
+          </a:lnRef>
+          <a:fillRef idx="3">
+            <a:schemeClr val="accent1"/>
+          </a:fillRef>
+          <a:effectRef idx="2">
+            <a:schemeClr val="accent1"/>
+          </a:effectRef>
+          <a:fontRef idx="minor">
+            <a:schemeClr val="lt1"/>
+          </a:fontRef>
+        </p:style>
+        <p:txBody>
+          <a:bodyPr rtlCol="0" anchor="ctr"/>
+          <a:lstStyle/>
+          <a:p>
+            <a:pPr algn="ctr"/>
+          </a:p>
+        </p:txBody>
+      </p:sp>
+      <p:sp>
+        <p:nvSpPr>
+          <p:cNvPr id="6" name="TextBox 5"/>
           <p:cNvSpPr txBox="1"/>
           <p:nvPr/>
         </p:nvSpPr>
         <p:spPr>
           <a:xfrm>
-            <a:off x="777240" y="1783080"/>
-            <a:ext cx="10637215" cy="4343400"/>
+            <a:off x="978408" y="2560320"/>
+            <a:ext cx="2899562" cy="640080"/>
+          </a:xfrm>
+          <a:prstGeom prst="rect">
+            <a:avLst/>
+          </a:prstGeom>
+          <a:noFill/>
+        </p:spPr>
+        <p:txBody>
+          <a:bodyPr wrap="square" lIns="0" rIns="0" tIns="0" bIns="0" anchor="t">
+            <a:spAutoFit/>
+          </a:bodyPr>
+          <a:lstStyle/>
+          <a:p>
+            <a:pPr algn="l">
+              <a:lnSpc>
+                <a:spcPct val="105000"/>
+              </a:lnSpc>
+              <a:spcAft>
+                <a:spcPts val="200"/>
+              </a:spcAft>
+            </a:pPr>
+            <a:r>
+              <a:rPr sz="1800" b="1" i="0">
+                <a:solidFill>
+                  <a:srgbClr val="1F2937"/>
+                </a:solidFill>
+                <a:latin typeface="Calibri"/>
+              </a:rPr>
+              <a:t>It answers at least one unanswerable question</a:t>
+            </a:r>
+          </a:p>
+        </p:txBody>
+      </p:sp>
+      <p:sp>
+        <p:nvSpPr>
+          <p:cNvPr id="7" name="TextBox 6"/>
+          <p:cNvSpPr txBox="1"/>
+          <p:nvPr/>
+        </p:nvSpPr>
+        <p:spPr>
+          <a:xfrm>
+            <a:off x="978408" y="3246120"/>
+            <a:ext cx="2899562" cy="1737360"/>
+          </a:xfrm>
+          <a:prstGeom prst="rect">
+            <a:avLst/>
+          </a:prstGeom>
+          <a:noFill/>
+        </p:spPr>
+        <p:txBody>
+          <a:bodyPr wrap="square" lIns="0" rIns="0" tIns="0" bIns="0" anchor="t">
+            <a:spAutoFit/>
+          </a:bodyPr>
+          <a:lstStyle/>
+          <a:p>
+            <a:pPr algn="l">
+              <a:lnSpc>
+                <a:spcPct val="105000"/>
+              </a:lnSpc>
+              <a:spcAft>
+                <a:spcPts val="200"/>
+              </a:spcAft>
+            </a:pPr>
+            <a:r>
+              <a:rPr sz="1350" b="0" i="0">
+                <a:solidFill>
+                  <a:srgbClr val="333D4B"/>
+                </a:solidFill>
+                <a:latin typeface="Calibri"/>
+              </a:rPr>
+              <a:t>Usually with something reasonable-sounding drawn from general knowledge, sometimes with a hedge attached. This is the mechanism from Week 3, on your own system, in front of you.</a:t>
+            </a:r>
+          </a:p>
+        </p:txBody>
+      </p:sp>
+      <p:sp>
+        <p:nvSpPr>
+          <p:cNvPr id="8" name="Rounded Rectangle 7"/>
+          <p:cNvSpPr/>
+          <p:nvPr/>
+        </p:nvSpPr>
+        <p:spPr>
+          <a:xfrm>
+            <a:off x="4444898" y="2057400"/>
+            <a:ext cx="3301898" cy="3200400"/>
+          </a:xfrm>
+          <a:prstGeom prst="roundRect">
+            <a:avLst>
+              <a:gd name="adj" fmla="val 10000"/>
+            </a:avLst>
+          </a:prstGeom>
+          <a:solidFill>
+            <a:srgbClr val="F1F5F9"/>
+          </a:solidFill>
+          <a:ln w="15875">
+            <a:solidFill>
+              <a:srgbClr val="D3DDE6"/>
+            </a:solidFill>
+          </a:ln>
+          <a:effectLst/>
+        </p:spPr>
+        <p:style>
+          <a:lnRef idx="1">
+            <a:schemeClr val="accent1"/>
+          </a:lnRef>
+          <a:fillRef idx="3">
+            <a:schemeClr val="accent1"/>
+          </a:fillRef>
+          <a:effectRef idx="2">
+            <a:schemeClr val="accent1"/>
+          </a:effectRef>
+          <a:fontRef idx="minor">
+            <a:schemeClr val="lt1"/>
+          </a:fontRef>
+        </p:style>
+        <p:txBody>
+          <a:bodyPr rtlCol="0" anchor="ctr"/>
+          <a:lstStyle/>
+          <a:p>
+            <a:pPr algn="ctr"/>
+          </a:p>
+        </p:txBody>
+      </p:sp>
+      <p:sp>
+        <p:nvSpPr>
+          <p:cNvPr id="9" name="Rectangle 8"/>
+          <p:cNvSpPr/>
+          <p:nvPr/>
+        </p:nvSpPr>
+        <p:spPr>
+          <a:xfrm>
+            <a:off x="4646066" y="2331720"/>
+            <a:ext cx="640080" cy="38100"/>
+          </a:xfrm>
+          <a:prstGeom prst="rect">
+            <a:avLst/>
+          </a:prstGeom>
+          <a:solidFill>
+            <a:srgbClr val="0F766E"/>
+          </a:solidFill>
+          <a:ln>
+            <a:noFill/>
+          </a:ln>
+          <a:effectLst/>
+        </p:spPr>
+        <p:style>
+          <a:lnRef idx="1">
+            <a:schemeClr val="accent1"/>
+          </a:lnRef>
+          <a:fillRef idx="3">
+            <a:schemeClr val="accent1"/>
+          </a:fillRef>
+          <a:effectRef idx="2">
+            <a:schemeClr val="accent1"/>
+          </a:effectRef>
+          <a:fontRef idx="minor">
+            <a:schemeClr val="lt1"/>
+          </a:fontRef>
+        </p:style>
+        <p:txBody>
+          <a:bodyPr rtlCol="0" anchor="ctr"/>
+          <a:lstStyle/>
+          <a:p>
+            <a:pPr algn="ctr"/>
+          </a:p>
+        </p:txBody>
+      </p:sp>
+      <p:sp>
+        <p:nvSpPr>
+          <p:cNvPr id="10" name="TextBox 9"/>
+          <p:cNvSpPr txBox="1"/>
+          <p:nvPr/>
+        </p:nvSpPr>
+        <p:spPr>
+          <a:xfrm>
+            <a:off x="4646066" y="2560320"/>
+            <a:ext cx="2899562" cy="640080"/>
+          </a:xfrm>
+          <a:prstGeom prst="rect">
+            <a:avLst/>
+          </a:prstGeom>
+          <a:noFill/>
+        </p:spPr>
+        <p:txBody>
+          <a:bodyPr wrap="square" lIns="0" rIns="0" tIns="0" bIns="0" anchor="t">
+            <a:spAutoFit/>
+          </a:bodyPr>
+          <a:lstStyle/>
+          <a:p>
+            <a:pPr algn="l">
+              <a:lnSpc>
+                <a:spcPct val="105000"/>
+              </a:lnSpc>
+              <a:spcAft>
+                <a:spcPts val="200"/>
+              </a:spcAft>
+            </a:pPr>
+            <a:r>
+              <a:rPr sz="1800" b="1" i="0">
+                <a:solidFill>
+                  <a:srgbClr val="1F2937"/>
+                </a:solidFill>
+                <a:latin typeface="Calibri"/>
+              </a:rPr>
+              <a:t>The hard questions expose retrieval, not reasoning</a:t>
+            </a:r>
+          </a:p>
+        </p:txBody>
+      </p:sp>
+      <p:sp>
+        <p:nvSpPr>
+          <p:cNvPr id="11" name="TextBox 10"/>
+          <p:cNvSpPr txBox="1"/>
+          <p:nvPr/>
+        </p:nvSpPr>
+        <p:spPr>
+          <a:xfrm>
+            <a:off x="4646066" y="3246120"/>
+            <a:ext cx="2899562" cy="1737360"/>
+          </a:xfrm>
+          <a:prstGeom prst="rect">
+            <a:avLst/>
+          </a:prstGeom>
+          <a:noFill/>
+        </p:spPr>
+        <p:txBody>
+          <a:bodyPr wrap="square" lIns="0" rIns="0" tIns="0" bIns="0" anchor="t">
+            <a:spAutoFit/>
+          </a:bodyPr>
+          <a:lstStyle/>
+          <a:p>
+            <a:pPr algn="l">
+              <a:lnSpc>
+                <a:spcPct val="105000"/>
+              </a:lnSpc>
+              <a:spcAft>
+                <a:spcPts val="200"/>
+              </a:spcAft>
+            </a:pPr>
+            <a:r>
+              <a:rPr sz="1350" b="0" i="0">
+                <a:solidFill>
+                  <a:srgbClr val="333D4B"/>
+                </a:solidFill>
+                <a:latin typeface="Calibri"/>
+              </a:rPr>
+              <a:t>Failures cluster on answers spread across sections, stated as exceptions, or held in tables. It did not reason badly — it never saw the right passage.</a:t>
+            </a:r>
+          </a:p>
+        </p:txBody>
+      </p:sp>
+      <p:sp>
+        <p:nvSpPr>
+          <p:cNvPr id="12" name="Rounded Rectangle 11"/>
+          <p:cNvSpPr/>
+          <p:nvPr/>
+        </p:nvSpPr>
+        <p:spPr>
+          <a:xfrm>
+            <a:off x="8112556" y="2057400"/>
+            <a:ext cx="3301898" cy="3200400"/>
+          </a:xfrm>
+          <a:prstGeom prst="roundRect">
+            <a:avLst>
+              <a:gd name="adj" fmla="val 10000"/>
+            </a:avLst>
+          </a:prstGeom>
+          <a:solidFill>
+            <a:srgbClr val="F1F5F9"/>
+          </a:solidFill>
+          <a:ln w="15875">
+            <a:solidFill>
+              <a:srgbClr val="D3DDE6"/>
+            </a:solidFill>
+          </a:ln>
+          <a:effectLst/>
+        </p:spPr>
+        <p:style>
+          <a:lnRef idx="1">
+            <a:schemeClr val="accent1"/>
+          </a:lnRef>
+          <a:fillRef idx="3">
+            <a:schemeClr val="accent1"/>
+          </a:fillRef>
+          <a:effectRef idx="2">
+            <a:schemeClr val="accent1"/>
+          </a:effectRef>
+          <a:fontRef idx="minor">
+            <a:schemeClr val="lt1"/>
+          </a:fontRef>
+        </p:style>
+        <p:txBody>
+          <a:bodyPr rtlCol="0" anchor="ctr"/>
+          <a:lstStyle/>
+          <a:p>
+            <a:pPr algn="ctr"/>
+          </a:p>
+        </p:txBody>
+      </p:sp>
+      <p:sp>
+        <p:nvSpPr>
+          <p:cNvPr id="13" name="Rectangle 12"/>
+          <p:cNvSpPr/>
+          <p:nvPr/>
+        </p:nvSpPr>
+        <p:spPr>
+          <a:xfrm>
+            <a:off x="8313724" y="2331720"/>
+            <a:ext cx="640080" cy="38100"/>
+          </a:xfrm>
+          <a:prstGeom prst="rect">
+            <a:avLst/>
+          </a:prstGeom>
+          <a:solidFill>
+            <a:srgbClr val="0F766E"/>
+          </a:solidFill>
+          <a:ln>
+            <a:noFill/>
+          </a:ln>
+          <a:effectLst/>
+        </p:spPr>
+        <p:style>
+          <a:lnRef idx="1">
+            <a:schemeClr val="accent1"/>
+          </a:lnRef>
+          <a:fillRef idx="3">
+            <a:schemeClr val="accent1"/>
+          </a:fillRef>
+          <a:effectRef idx="2">
+            <a:schemeClr val="accent1"/>
+          </a:effectRef>
+          <a:fontRef idx="minor">
+            <a:schemeClr val="lt1"/>
+          </a:fontRef>
+        </p:style>
+        <p:txBody>
+          <a:bodyPr rtlCol="0" anchor="ctr"/>
+          <a:lstStyle/>
+          <a:p>
+            <a:pPr algn="ctr"/>
+          </a:p>
+        </p:txBody>
+      </p:sp>
+      <p:sp>
+        <p:nvSpPr>
+          <p:cNvPr id="14" name="TextBox 13"/>
+          <p:cNvSpPr txBox="1"/>
+          <p:nvPr/>
+        </p:nvSpPr>
+        <p:spPr>
+          <a:xfrm>
+            <a:off x="8313724" y="2560320"/>
+            <a:ext cx="2899562" cy="640080"/>
+          </a:xfrm>
+          <a:prstGeom prst="rect">
+            <a:avLst/>
+          </a:prstGeom>
+          <a:noFill/>
+        </p:spPr>
+        <p:txBody>
+          <a:bodyPr wrap="square" lIns="0" rIns="0" tIns="0" bIns="0" anchor="t">
+            <a:spAutoFit/>
+          </a:bodyPr>
+          <a:lstStyle/>
+          <a:p>
+            <a:pPr algn="l">
+              <a:lnSpc>
+                <a:spcPct val="105000"/>
+              </a:lnSpc>
+              <a:spcAft>
+                <a:spcPts val="200"/>
+              </a:spcAft>
+            </a:pPr>
+            <a:r>
+              <a:rPr sz="1800" b="1" i="0">
+                <a:solidFill>
+                  <a:srgbClr val="1F2937"/>
+                </a:solidFill>
+                <a:latin typeface="Calibri"/>
+              </a:rPr>
+              <a:t>Over-reading is the most common wrong answer</a:t>
+            </a:r>
+          </a:p>
+        </p:txBody>
+      </p:sp>
+      <p:sp>
+        <p:nvSpPr>
+          <p:cNvPr id="15" name="TextBox 14"/>
+          <p:cNvSpPr txBox="1"/>
+          <p:nvPr/>
+        </p:nvSpPr>
+        <p:spPr>
+          <a:xfrm>
+            <a:off x="8313724" y="3246120"/>
+            <a:ext cx="2899562" cy="1737360"/>
+          </a:xfrm>
+          <a:prstGeom prst="rect">
+            <a:avLst/>
+          </a:prstGeom>
+          <a:noFill/>
+        </p:spPr>
+        <p:txBody>
+          <a:bodyPr wrap="square" lIns="0" rIns="0" tIns="0" bIns="0" anchor="t">
+            <a:spAutoFit/>
+          </a:bodyPr>
+          <a:lstStyle/>
+          <a:p>
+            <a:pPr algn="l">
+              <a:lnSpc>
+                <a:spcPct val="105000"/>
+              </a:lnSpc>
+              <a:spcAft>
+                <a:spcPts val="200"/>
+              </a:spcAft>
+            </a:pPr>
+            <a:r>
+              <a:rPr sz="1350" b="0" i="0">
+                <a:solidFill>
+                  <a:srgbClr val="333D4B"/>
+                </a:solidFill>
+                <a:latin typeface="Calibri"/>
+              </a:rPr>
+              <a:t>The claim is stronger than the quoted sentence supports. "May" becomes "must"; a specific case becomes a general rule.</a:t>
+            </a:r>
+          </a:p>
+        </p:txBody>
+      </p:sp>
+      <p:sp>
+        <p:nvSpPr>
+          <p:cNvPr id="16" name="TextBox 15"/>
+          <p:cNvSpPr txBox="1"/>
+          <p:nvPr/>
+        </p:nvSpPr>
+        <p:spPr>
+          <a:xfrm>
+            <a:off x="777240" y="6355080"/>
+            <a:ext cx="10637215" cy="274320"/>
           </a:xfrm>
           <a:prstGeom prst="rect">
             <a:avLst/>
@@ -8294,179 +9195,13 @@
           </a:bodyPr>
           <a:lstStyle/>
           <a:p>
-            <a:pPr>
-              <a:lnSpc>
-                <a:spcPct val="115000"/>
-              </a:lnSpc>
-              <a:spcAft>
-                <a:spcPts val="1000"/>
-              </a:spcAft>
-            </a:pPr>
-            <a:r>
-              <a:rPr sz="1900" b="0" i="0">
-                <a:solidFill>
-                  <a:srgbClr val="1F2937"/>
+            <a:r>
+              <a:rPr sz="1000" b="0" i="0">
+                <a:solidFill>
+                  <a:srgbClr val="6B7787"/>
                 </a:solidFill>
                 <a:latin typeface="Calibri"/>
               </a:rPr>
-              <a:t>•  Generating is fast; checking is slow; the gap grows as quality rises</a:t>
-            </a:r>
-          </a:p>
-          <a:p>
-            <a:pPr>
-              <a:lnSpc>
-                <a:spcPct val="115000"/>
-              </a:lnSpc>
-              <a:spcAft>
-                <a:spcPts val="1000"/>
-              </a:spcAft>
-            </a:pPr>
-            <a:r>
-              <a:rPr sz="1900" b="0" i="0">
-                <a:solidFill>
-                  <a:srgbClr val="1F2937"/>
-                </a:solidFill>
-                <a:latin typeface="Calibri"/>
-              </a:rPr>
-              <a:t>•  Test the system once, deliberately, instead of hoping to catch errors forever</a:t>
-            </a:r>
-          </a:p>
-          <a:p>
-            <a:pPr>
-              <a:lnSpc>
-                <a:spcPct val="115000"/>
-              </a:lnSpc>
-              <a:spcAft>
-                <a:spcPts val="1000"/>
-              </a:spcAft>
-            </a:pPr>
-            <a:r>
-              <a:rPr sz="1900" b="1" i="0">
-                <a:solidFill>
-                  <a:srgbClr val="1F2937"/>
-                </a:solidFill>
-                <a:latin typeface="Calibri"/>
-              </a:rPr>
-              <a:t>•  Three unanswerable questions tell you more than seven answerable ones</a:t>
-            </a:r>
-          </a:p>
-          <a:p>
-            <a:pPr>
-              <a:lnSpc>
-                <a:spcPct val="115000"/>
-              </a:lnSpc>
-              <a:spcAft>
-                <a:spcPts val="1000"/>
-              </a:spcAft>
-            </a:pPr>
-            <a:r>
-              <a:rPr sz="1900" b="0" i="0">
-                <a:solidFill>
-                  <a:srgbClr val="1F2937"/>
-                </a:solidFill>
-                <a:latin typeface="Calibri"/>
-              </a:rPr>
-              <a:t>•  Grade the pattern, not the score</a:t>
-            </a:r>
-          </a:p>
-          <a:p>
-            <a:pPr>
-              <a:lnSpc>
-                <a:spcPct val="115000"/>
-              </a:lnSpc>
-              <a:spcAft>
-                <a:spcPts val="1000"/>
-              </a:spcAft>
-            </a:pPr>
-            <a:r>
-              <a:rPr sz="1900" b="0" i="0">
-                <a:solidFill>
-                  <a:srgbClr val="1F2937"/>
-                </a:solidFill>
-                <a:latin typeface="Calibri"/>
-              </a:rPr>
-              <a:t>•  Asking twice is not checking — verification needs something outside the system</a:t>
-            </a:r>
-          </a:p>
-          <a:p>
-            <a:pPr>
-              <a:lnSpc>
-                <a:spcPct val="115000"/>
-              </a:lnSpc>
-              <a:spcAft>
-                <a:spcPts val="1000"/>
-              </a:spcAft>
-            </a:pPr>
-          </a:p>
-          <a:p>
-            <a:pPr>
-              <a:lnSpc>
-                <a:spcPct val="115000"/>
-              </a:lnSpc>
-              <a:spcAft>
-                <a:spcPts val="1000"/>
-              </a:spcAft>
-            </a:pPr>
-            <a:r>
-              <a:rPr sz="1900" b="1" i="0">
-                <a:solidFill>
-                  <a:srgbClr val="1F2937"/>
-                </a:solidFill>
-                <a:latin typeface="Calibri"/>
-              </a:rPr>
-              <a:t>•  Next week:</a:t>
-            </a:r>
-          </a:p>
-          <a:p>
-            <a:pPr lvl="1">
-              <a:lnSpc>
-                <a:spcPct val="115000"/>
-              </a:lnSpc>
-              <a:spcAft>
-                <a:spcPts val="500"/>
-              </a:spcAft>
-            </a:pPr>
-            <a:r>
-              <a:rPr sz="1600" b="0" i="0">
-                <a:solidFill>
-                  <a:srgbClr val="333D4B"/>
-                </a:solidFill>
-                <a:latin typeface="Calibri"/>
-              </a:rPr>
-              <a:t>—  AI Agents and Workflow Automation — what happens when it acts without you watching</a:t>
-            </a:r>
-          </a:p>
-        </p:txBody>
-      </p:sp>
-      <p:sp>
-        <p:nvSpPr>
-          <p:cNvPr id="5" name="TextBox 4"/>
-          <p:cNvSpPr txBox="1"/>
-          <p:nvPr/>
-        </p:nvSpPr>
-        <p:spPr>
-          <a:xfrm>
-            <a:off x="777240" y="6355080"/>
-            <a:ext cx="10637215" cy="274320"/>
-          </a:xfrm>
-          <a:prstGeom prst="rect">
-            <a:avLst/>
-          </a:prstGeom>
-          <a:noFill/>
-        </p:spPr>
-        <p:txBody>
-          <a:bodyPr wrap="square" lIns="0" rIns="0" tIns="0" bIns="0">
-            <a:spAutoFit/>
-          </a:bodyPr>
-          <a:lstStyle/>
-          <a:p>
-            <a:r>
-              <a:rPr sz="1000" b="0" i="0">
-                <a:solidFill>
-                  <a:srgbClr val="6B7787"/>
-                </a:solidFill>
-                <a:latin typeface="Calibri"/>
-              </a:rPr>
               <a:t>Week 8  ·  Prompt Engineering and Large Language Models</a:t>
             </a:r>
           </a:p>
@@ -8474,7 +9209,7 @@
       </p:sp>
       <p:sp>
         <p:nvSpPr>
-          <p:cNvPr id="6" name="TextBox 5"/>
+          <p:cNvPr id="17" name="TextBox 16"/>
           <p:cNvSpPr txBox="1"/>
           <p:nvPr/>
         </p:nvSpPr>
@@ -8527,58 +9262,14 @@
       <p:grpSpPr/>
       <p:sp>
         <p:nvSpPr>
-          <p:cNvPr id="2" name="Rectangle 1"/>
-          <p:cNvSpPr/>
-          <p:nvPr/>
-        </p:nvSpPr>
-        <p:spPr>
-          <a:xfrm>
-            <a:off x="0" y="0"/>
-            <a:ext cx="12191695" cy="6858000"/>
-          </a:xfrm>
-          <a:prstGeom prst="rect">
-            <a:avLst/>
-          </a:prstGeom>
-          <a:solidFill>
-            <a:srgbClr val="1F2937"/>
-          </a:solidFill>
-          <a:ln>
-            <a:noFill/>
-          </a:ln>
-          <a:effectLst/>
-        </p:spPr>
-        <p:style>
-          <a:lnRef idx="1">
-            <a:schemeClr val="accent1"/>
-          </a:lnRef>
-          <a:fillRef idx="3">
-            <a:schemeClr val="accent1"/>
-          </a:fillRef>
-          <a:effectRef idx="2">
-            <a:schemeClr val="accent1"/>
-          </a:effectRef>
-          <a:fontRef idx="minor">
-            <a:schemeClr val="lt1"/>
-          </a:fontRef>
-        </p:style>
-        <p:txBody>
-          <a:bodyPr rtlCol="0" anchor="ctr"/>
-          <a:lstStyle/>
-          <a:p>
-            <a:pPr algn="ctr"/>
-          </a:p>
-        </p:txBody>
-      </p:sp>
-      <p:sp>
-        <p:nvSpPr>
-          <p:cNvPr id="3" name="TextBox 2"/>
+          <p:cNvPr id="2" name="TextBox 1"/>
           <p:cNvSpPr txBox="1"/>
           <p:nvPr/>
         </p:nvSpPr>
         <p:spPr>
           <a:xfrm>
-            <a:off x="777240" y="2468880"/>
-            <a:ext cx="10241280" cy="914400"/>
+            <a:off x="777240" y="566928"/>
+            <a:ext cx="10637215" cy="822960"/>
           </a:xfrm>
           <a:prstGeom prst="rect">
             <a:avLst/>
@@ -8592,27 +9283,27 @@
           <a:lstStyle/>
           <a:p>
             <a:r>
-              <a:rPr sz="4400" b="1" i="0">
-                <a:solidFill>
-                  <a:srgbClr val="FFFFFF"/>
+              <a:rPr sz="3000" b="1" i="0">
+                <a:solidFill>
+                  <a:srgbClr val="1F2937"/>
                 </a:solidFill>
                 <a:latin typeface="Calibri Light"/>
               </a:rPr>
-              <a:t>Questions?</a:t>
-            </a:r>
-          </a:p>
-        </p:txBody>
-      </p:sp>
-      <p:sp>
-        <p:nvSpPr>
-          <p:cNvPr id="4" name="Rectangle 3"/>
+              <a:t>What to Do With What You Found</a:t>
+            </a:r>
+          </a:p>
+        </p:txBody>
+      </p:sp>
+      <p:sp>
+        <p:nvSpPr>
+          <p:cNvPr id="3" name="Rectangle 2"/>
           <p:cNvSpPr/>
           <p:nvPr/>
         </p:nvSpPr>
         <p:spPr>
           <a:xfrm>
-            <a:off x="777240" y="3566160"/>
-            <a:ext cx="1051560" cy="50800"/>
+            <a:off x="777240" y="1417320"/>
+            <a:ext cx="1051560" cy="38100"/>
           </a:xfrm>
           <a:prstGeom prst="rect">
             <a:avLst/>
@@ -8649,14 +9340,542 @@
       </p:sp>
       <p:sp>
         <p:nvSpPr>
-          <p:cNvPr id="5" name="TextBox 4"/>
+          <p:cNvPr id="4" name="Rounded Rectangle 3"/>
+          <p:cNvSpPr/>
+          <p:nvPr/>
+        </p:nvSpPr>
+        <p:spPr>
+          <a:xfrm>
+            <a:off x="777240" y="2057400"/>
+            <a:ext cx="3301898" cy="3200400"/>
+          </a:xfrm>
+          <a:prstGeom prst="roundRect">
+            <a:avLst>
+              <a:gd name="adj" fmla="val 10000"/>
+            </a:avLst>
+          </a:prstGeom>
+          <a:solidFill>
+            <a:srgbClr val="F1F5F9"/>
+          </a:solidFill>
+          <a:ln w="15875">
+            <a:solidFill>
+              <a:srgbClr val="D3DDE6"/>
+            </a:solidFill>
+          </a:ln>
+          <a:effectLst/>
+        </p:spPr>
+        <p:style>
+          <a:lnRef idx="1">
+            <a:schemeClr val="accent1"/>
+          </a:lnRef>
+          <a:fillRef idx="3">
+            <a:schemeClr val="accent1"/>
+          </a:fillRef>
+          <a:effectRef idx="2">
+            <a:schemeClr val="accent1"/>
+          </a:effectRef>
+          <a:fontRef idx="minor">
+            <a:schemeClr val="lt1"/>
+          </a:fontRef>
+        </p:style>
+        <p:txBody>
+          <a:bodyPr rtlCol="0" anchor="ctr"/>
+          <a:lstStyle/>
+          <a:p>
+            <a:pPr algn="ctr"/>
+          </a:p>
+        </p:txBody>
+      </p:sp>
+      <p:sp>
+        <p:nvSpPr>
+          <p:cNvPr id="5" name="Rectangle 4"/>
+          <p:cNvSpPr/>
+          <p:nvPr/>
+        </p:nvSpPr>
+        <p:spPr>
+          <a:xfrm>
+            <a:off x="978408" y="2331720"/>
+            <a:ext cx="640080" cy="38100"/>
+          </a:xfrm>
+          <a:prstGeom prst="rect">
+            <a:avLst/>
+          </a:prstGeom>
+          <a:solidFill>
+            <a:srgbClr val="0F766E"/>
+          </a:solidFill>
+          <a:ln>
+            <a:noFill/>
+          </a:ln>
+          <a:effectLst/>
+        </p:spPr>
+        <p:style>
+          <a:lnRef idx="1">
+            <a:schemeClr val="accent1"/>
+          </a:lnRef>
+          <a:fillRef idx="3">
+            <a:schemeClr val="accent1"/>
+          </a:fillRef>
+          <a:effectRef idx="2">
+            <a:schemeClr val="accent1"/>
+          </a:effectRef>
+          <a:fontRef idx="minor">
+            <a:schemeClr val="lt1"/>
+          </a:fontRef>
+        </p:style>
+        <p:txBody>
+          <a:bodyPr rtlCol="0" anchor="ctr"/>
+          <a:lstStyle/>
+          <a:p>
+            <a:pPr algn="ctr"/>
+          </a:p>
+        </p:txBody>
+      </p:sp>
+      <p:sp>
+        <p:nvSpPr>
+          <p:cNvPr id="6" name="TextBox 5"/>
           <p:cNvSpPr txBox="1"/>
           <p:nvPr/>
         </p:nvSpPr>
         <p:spPr>
           <a:xfrm>
-            <a:off x="777240" y="3931920"/>
-            <a:ext cx="10241280" cy="914400"/>
+            <a:off x="978408" y="2560320"/>
+            <a:ext cx="2899562" cy="640080"/>
+          </a:xfrm>
+          <a:prstGeom prst="rect">
+            <a:avLst/>
+          </a:prstGeom>
+          <a:noFill/>
+        </p:spPr>
+        <p:txBody>
+          <a:bodyPr wrap="square" lIns="0" rIns="0" tIns="0" bIns="0" anchor="t">
+            <a:spAutoFit/>
+          </a:bodyPr>
+          <a:lstStyle/>
+          <a:p>
+            <a:pPr algn="l">
+              <a:lnSpc>
+                <a:spcPct val="105000"/>
+              </a:lnSpc>
+              <a:spcAft>
+                <a:spcPts val="200"/>
+              </a:spcAft>
+            </a:pPr>
+            <a:r>
+              <a:rPr sz="1800" b="1" i="0">
+                <a:solidFill>
+                  <a:srgbClr val="1F2937"/>
+                </a:solidFill>
+                <a:latin typeface="Calibri"/>
+              </a:rPr>
+              <a:t>It answered the unanswerable</a:t>
+            </a:r>
+          </a:p>
+        </p:txBody>
+      </p:sp>
+      <p:sp>
+        <p:nvSpPr>
+          <p:cNvPr id="7" name="TextBox 6"/>
+          <p:cNvSpPr txBox="1"/>
+          <p:nvPr/>
+        </p:nvSpPr>
+        <p:spPr>
+          <a:xfrm>
+            <a:off x="978408" y="3246120"/>
+            <a:ext cx="2899562" cy="1737360"/>
+          </a:xfrm>
+          <a:prstGeom prst="rect">
+            <a:avLst/>
+          </a:prstGeom>
+          <a:noFill/>
+        </p:spPr>
+        <p:txBody>
+          <a:bodyPr wrap="square" lIns="0" rIns="0" tIns="0" bIns="0" anchor="t">
+            <a:spAutoFit/>
+          </a:bodyPr>
+          <a:lstStyle/>
+          <a:p>
+            <a:pPr algn="l">
+              <a:lnSpc>
+                <a:spcPct val="105000"/>
+              </a:lnSpc>
+              <a:spcAft>
+                <a:spcPts val="200"/>
+              </a:spcAft>
+            </a:pPr>
+            <a:r>
+              <a:rPr sz="1350" b="0" i="0">
+                <a:solidFill>
+                  <a:srgbClr val="333D4B"/>
+                </a:solidFill>
+                <a:latin typeface="Calibri"/>
+              </a:rPr>
+              <a:t>Strengthen the refusal instruction and make the string shorter and more visible. Retest. If it still answers, treat every uncited claim from that system as unverified.</a:t>
+            </a:r>
+          </a:p>
+        </p:txBody>
+      </p:sp>
+      <p:sp>
+        <p:nvSpPr>
+          <p:cNvPr id="8" name="Rounded Rectangle 7"/>
+          <p:cNvSpPr/>
+          <p:nvPr/>
+        </p:nvSpPr>
+        <p:spPr>
+          <a:xfrm>
+            <a:off x="4444898" y="2057400"/>
+            <a:ext cx="3301898" cy="3200400"/>
+          </a:xfrm>
+          <a:prstGeom prst="roundRect">
+            <a:avLst>
+              <a:gd name="adj" fmla="val 10000"/>
+            </a:avLst>
+          </a:prstGeom>
+          <a:solidFill>
+            <a:srgbClr val="F1F5F9"/>
+          </a:solidFill>
+          <a:ln w="15875">
+            <a:solidFill>
+              <a:srgbClr val="D3DDE6"/>
+            </a:solidFill>
+          </a:ln>
+          <a:effectLst/>
+        </p:spPr>
+        <p:style>
+          <a:lnRef idx="1">
+            <a:schemeClr val="accent1"/>
+          </a:lnRef>
+          <a:fillRef idx="3">
+            <a:schemeClr val="accent1"/>
+          </a:fillRef>
+          <a:effectRef idx="2">
+            <a:schemeClr val="accent1"/>
+          </a:effectRef>
+          <a:fontRef idx="minor">
+            <a:schemeClr val="lt1"/>
+          </a:fontRef>
+        </p:style>
+        <p:txBody>
+          <a:bodyPr rtlCol="0" anchor="ctr"/>
+          <a:lstStyle/>
+          <a:p>
+            <a:pPr algn="ctr"/>
+          </a:p>
+        </p:txBody>
+      </p:sp>
+      <p:sp>
+        <p:nvSpPr>
+          <p:cNvPr id="9" name="Rectangle 8"/>
+          <p:cNvSpPr/>
+          <p:nvPr/>
+        </p:nvSpPr>
+        <p:spPr>
+          <a:xfrm>
+            <a:off x="4646066" y="2331720"/>
+            <a:ext cx="640080" cy="38100"/>
+          </a:xfrm>
+          <a:prstGeom prst="rect">
+            <a:avLst/>
+          </a:prstGeom>
+          <a:solidFill>
+            <a:srgbClr val="0F766E"/>
+          </a:solidFill>
+          <a:ln>
+            <a:noFill/>
+          </a:ln>
+          <a:effectLst/>
+        </p:spPr>
+        <p:style>
+          <a:lnRef idx="1">
+            <a:schemeClr val="accent1"/>
+          </a:lnRef>
+          <a:fillRef idx="3">
+            <a:schemeClr val="accent1"/>
+          </a:fillRef>
+          <a:effectRef idx="2">
+            <a:schemeClr val="accent1"/>
+          </a:effectRef>
+          <a:fontRef idx="minor">
+            <a:schemeClr val="lt1"/>
+          </a:fontRef>
+        </p:style>
+        <p:txBody>
+          <a:bodyPr rtlCol="0" anchor="ctr"/>
+          <a:lstStyle/>
+          <a:p>
+            <a:pPr algn="ctr"/>
+          </a:p>
+        </p:txBody>
+      </p:sp>
+      <p:sp>
+        <p:nvSpPr>
+          <p:cNvPr id="10" name="TextBox 9"/>
+          <p:cNvSpPr txBox="1"/>
+          <p:nvPr/>
+        </p:nvSpPr>
+        <p:spPr>
+          <a:xfrm>
+            <a:off x="4646066" y="2560320"/>
+            <a:ext cx="2899562" cy="640080"/>
+          </a:xfrm>
+          <a:prstGeom prst="rect">
+            <a:avLst/>
+          </a:prstGeom>
+          <a:noFill/>
+        </p:spPr>
+        <p:txBody>
+          <a:bodyPr wrap="square" lIns="0" rIns="0" tIns="0" bIns="0" anchor="t">
+            <a:spAutoFit/>
+          </a:bodyPr>
+          <a:lstStyle/>
+          <a:p>
+            <a:pPr algn="l">
+              <a:lnSpc>
+                <a:spcPct val="105000"/>
+              </a:lnSpc>
+              <a:spcAft>
+                <a:spcPts val="200"/>
+              </a:spcAft>
+            </a:pPr>
+            <a:r>
+              <a:rPr sz="1800" b="1" i="0">
+                <a:solidFill>
+                  <a:srgbClr val="1F2937"/>
+                </a:solidFill>
+                <a:latin typeface="Calibri"/>
+              </a:rPr>
+              <a:t>It failed on exceptions and tables</a:t>
+            </a:r>
+          </a:p>
+        </p:txBody>
+      </p:sp>
+      <p:sp>
+        <p:nvSpPr>
+          <p:cNvPr id="11" name="TextBox 10"/>
+          <p:cNvSpPr txBox="1"/>
+          <p:nvPr/>
+        </p:nvSpPr>
+        <p:spPr>
+          <a:xfrm>
+            <a:off x="4646066" y="3246120"/>
+            <a:ext cx="2899562" cy="1737360"/>
+          </a:xfrm>
+          <a:prstGeom prst="rect">
+            <a:avLst/>
+          </a:prstGeom>
+          <a:noFill/>
+        </p:spPr>
+        <p:txBody>
+          <a:bodyPr wrap="square" lIns="0" rIns="0" tIns="0" bIns="0" anchor="t">
+            <a:spAutoFit/>
+          </a:bodyPr>
+          <a:lstStyle/>
+          <a:p>
+            <a:pPr algn="l">
+              <a:lnSpc>
+                <a:spcPct val="105000"/>
+              </a:lnSpc>
+              <a:spcAft>
+                <a:spcPts val="200"/>
+              </a:spcAft>
+            </a:pPr>
+            <a:r>
+              <a:rPr sz="1350" b="0" i="0">
+                <a:solidFill>
+                  <a:srgbClr val="333D4B"/>
+                </a:solidFill>
+                <a:latin typeface="Calibri"/>
+              </a:rPr>
+              <a:t>That is a document problem, not a prompting problem. Split the source into topic-sized sections with descriptive headings, and retest the same questions.</a:t>
+            </a:r>
+          </a:p>
+        </p:txBody>
+      </p:sp>
+      <p:sp>
+        <p:nvSpPr>
+          <p:cNvPr id="12" name="Rounded Rectangle 11"/>
+          <p:cNvSpPr/>
+          <p:nvPr/>
+        </p:nvSpPr>
+        <p:spPr>
+          <a:xfrm>
+            <a:off x="8112556" y="2057400"/>
+            <a:ext cx="3301898" cy="3200400"/>
+          </a:xfrm>
+          <a:prstGeom prst="roundRect">
+            <a:avLst>
+              <a:gd name="adj" fmla="val 10000"/>
+            </a:avLst>
+          </a:prstGeom>
+          <a:solidFill>
+            <a:srgbClr val="F1F5F9"/>
+          </a:solidFill>
+          <a:ln w="15875">
+            <a:solidFill>
+              <a:srgbClr val="D3DDE6"/>
+            </a:solidFill>
+          </a:ln>
+          <a:effectLst/>
+        </p:spPr>
+        <p:style>
+          <a:lnRef idx="1">
+            <a:schemeClr val="accent1"/>
+          </a:lnRef>
+          <a:fillRef idx="3">
+            <a:schemeClr val="accent1"/>
+          </a:fillRef>
+          <a:effectRef idx="2">
+            <a:schemeClr val="accent1"/>
+          </a:effectRef>
+          <a:fontRef idx="minor">
+            <a:schemeClr val="lt1"/>
+          </a:fontRef>
+        </p:style>
+        <p:txBody>
+          <a:bodyPr rtlCol="0" anchor="ctr"/>
+          <a:lstStyle/>
+          <a:p>
+            <a:pPr algn="ctr"/>
+          </a:p>
+        </p:txBody>
+      </p:sp>
+      <p:sp>
+        <p:nvSpPr>
+          <p:cNvPr id="13" name="Rectangle 12"/>
+          <p:cNvSpPr/>
+          <p:nvPr/>
+        </p:nvSpPr>
+        <p:spPr>
+          <a:xfrm>
+            <a:off x="8313724" y="2331720"/>
+            <a:ext cx="640080" cy="38100"/>
+          </a:xfrm>
+          <a:prstGeom prst="rect">
+            <a:avLst/>
+          </a:prstGeom>
+          <a:solidFill>
+            <a:srgbClr val="0F766E"/>
+          </a:solidFill>
+          <a:ln>
+            <a:noFill/>
+          </a:ln>
+          <a:effectLst/>
+        </p:spPr>
+        <p:style>
+          <a:lnRef idx="1">
+            <a:schemeClr val="accent1"/>
+          </a:lnRef>
+          <a:fillRef idx="3">
+            <a:schemeClr val="accent1"/>
+          </a:fillRef>
+          <a:effectRef idx="2">
+            <a:schemeClr val="accent1"/>
+          </a:effectRef>
+          <a:fontRef idx="minor">
+            <a:schemeClr val="lt1"/>
+          </a:fontRef>
+        </p:style>
+        <p:txBody>
+          <a:bodyPr rtlCol="0" anchor="ctr"/>
+          <a:lstStyle/>
+          <a:p>
+            <a:pPr algn="ctr"/>
+          </a:p>
+        </p:txBody>
+      </p:sp>
+      <p:sp>
+        <p:nvSpPr>
+          <p:cNvPr id="14" name="TextBox 13"/>
+          <p:cNvSpPr txBox="1"/>
+          <p:nvPr/>
+        </p:nvSpPr>
+        <p:spPr>
+          <a:xfrm>
+            <a:off x="8313724" y="2560320"/>
+            <a:ext cx="2899562" cy="640080"/>
+          </a:xfrm>
+          <a:prstGeom prst="rect">
+            <a:avLst/>
+          </a:prstGeom>
+          <a:noFill/>
+        </p:spPr>
+        <p:txBody>
+          <a:bodyPr wrap="square" lIns="0" rIns="0" tIns="0" bIns="0" anchor="t">
+            <a:spAutoFit/>
+          </a:bodyPr>
+          <a:lstStyle/>
+          <a:p>
+            <a:pPr algn="l">
+              <a:lnSpc>
+                <a:spcPct val="105000"/>
+              </a:lnSpc>
+              <a:spcAft>
+                <a:spcPts val="200"/>
+              </a:spcAft>
+            </a:pPr>
+            <a:r>
+              <a:rPr sz="1800" b="1" i="0">
+                <a:solidFill>
+                  <a:srgbClr val="1F2937"/>
+                </a:solidFill>
+                <a:latin typeface="Calibri"/>
+              </a:rPr>
+              <a:t>It over-read repeatedly</a:t>
+            </a:r>
+          </a:p>
+        </p:txBody>
+      </p:sp>
+      <p:sp>
+        <p:nvSpPr>
+          <p:cNvPr id="15" name="TextBox 14"/>
+          <p:cNvSpPr txBox="1"/>
+          <p:nvPr/>
+        </p:nvSpPr>
+        <p:spPr>
+          <a:xfrm>
+            <a:off x="8313724" y="3246120"/>
+            <a:ext cx="2899562" cy="1737360"/>
+          </a:xfrm>
+          <a:prstGeom prst="rect">
+            <a:avLst/>
+          </a:prstGeom>
+          <a:noFill/>
+        </p:spPr>
+        <p:txBody>
+          <a:bodyPr wrap="square" lIns="0" rIns="0" tIns="0" bIns="0" anchor="t">
+            <a:spAutoFit/>
+          </a:bodyPr>
+          <a:lstStyle/>
+          <a:p>
+            <a:pPr algn="l">
+              <a:lnSpc>
+                <a:spcPct val="105000"/>
+              </a:lnSpc>
+              <a:spcAft>
+                <a:spcPts val="200"/>
+              </a:spcAft>
+            </a:pPr>
+            <a:r>
+              <a:rPr sz="1350" b="0" i="0">
+                <a:solidFill>
+                  <a:srgbClr val="333D4B"/>
+                </a:solidFill>
+                <a:latin typeface="Calibri"/>
+              </a:rPr>
+              <a:t>Add a constraint: "Do not state a requirement more strongly than the source. If the source says may, do not write must." Then check that specific behaviour again.</a:t>
+            </a:r>
+          </a:p>
+        </p:txBody>
+      </p:sp>
+      <p:sp>
+        <p:nvSpPr>
+          <p:cNvPr id="16" name="TextBox 15"/>
+          <p:cNvSpPr txBox="1"/>
+          <p:nvPr/>
+        </p:nvSpPr>
+        <p:spPr>
+          <a:xfrm>
+            <a:off x="777240" y="6355080"/>
+            <a:ext cx="10637215" cy="274320"/>
           </a:xfrm>
           <a:prstGeom prst="rect">
             <a:avLst/>
@@ -8669,35 +9888,802 @@
           </a:bodyPr>
           <a:lstStyle/>
           <a:p>
+            <a:r>
+              <a:rPr sz="1000" b="0" i="0">
+                <a:solidFill>
+                  <a:srgbClr val="6B7787"/>
+                </a:solidFill>
+                <a:latin typeface="Calibri"/>
+              </a:rPr>
+              <a:t>Week 8  ·  Prompt Engineering and Large Language Models</a:t>
+            </a:r>
+          </a:p>
+        </p:txBody>
+      </p:sp>
+      <p:sp>
+        <p:nvSpPr>
+          <p:cNvPr id="17" name="TextBox 16"/>
+          <p:cNvSpPr txBox="1"/>
+          <p:nvPr/>
+        </p:nvSpPr>
+        <p:spPr>
+          <a:xfrm>
+            <a:off x="10500055" y="6355080"/>
+            <a:ext cx="914400" cy="274320"/>
+          </a:xfrm>
+          <a:prstGeom prst="rect">
+            <a:avLst/>
+          </a:prstGeom>
+          <a:noFill/>
+        </p:spPr>
+        <p:txBody>
+          <a:bodyPr wrap="square" lIns="0" rIns="0" tIns="0" bIns="0">
+            <a:spAutoFit/>
+          </a:bodyPr>
+          <a:lstStyle/>
+          <a:p>
+            <a:pPr algn="r"/>
+            <a:r>
+              <a:rPr sz="1000" b="0" i="0">
+                <a:solidFill>
+                  <a:srgbClr val="6B7787"/>
+                </a:solidFill>
+                <a:latin typeface="Calibri"/>
+              </a:rPr>
+              <a:t>17</a:t>
+            </a:r>
+          </a:p>
+        </p:txBody>
+      </p:sp>
+    </p:spTree>
+  </p:cSld>
+  <p:clrMapOvr>
+    <a:masterClrMapping/>
+  </p:clrMapOvr>
+</p:sld>
+</file>
+
+<file path=ppt/slides/slide18.xml><?xml version="1.0" encoding="utf-8"?>
+<p:sld xmlns:a="http://schemas.openxmlformats.org/drawingml/2006/main" xmlns:p="http://schemas.openxmlformats.org/presentationml/2006/main" xmlns:r="http://schemas.openxmlformats.org/officeDocument/2006/relationships">
+  <p:cSld>
+    <p:spTree>
+      <p:nvGrpSpPr>
+        <p:cNvPr id="1" name=""/>
+        <p:cNvGrpSpPr/>
+        <p:nvPr/>
+      </p:nvGrpSpPr>
+      <p:grpSpPr/>
+      <p:sp>
+        <p:nvSpPr>
+          <p:cNvPr id="2" name="TextBox 1"/>
+          <p:cNvSpPr txBox="1"/>
+          <p:nvPr/>
+        </p:nvSpPr>
+        <p:spPr>
+          <a:xfrm>
+            <a:off x="777240" y="566928"/>
+            <a:ext cx="10637215" cy="822960"/>
+          </a:xfrm>
+          <a:prstGeom prst="rect">
+            <a:avLst/>
+          </a:prstGeom>
+          <a:noFill/>
+        </p:spPr>
+        <p:txBody>
+          <a:bodyPr wrap="square" lIns="0" rIns="0" tIns="0" bIns="0">
+            <a:spAutoFit/>
+          </a:bodyPr>
+          <a:lstStyle/>
+          <a:p>
+            <a:r>
+              <a:rPr sz="3000" b="1" i="0">
+                <a:solidFill>
+                  <a:srgbClr val="1F2937"/>
+                </a:solidFill>
+                <a:latin typeface="Calibri Light"/>
+              </a:rPr>
+              <a:t>Concepts You Must Be Able to Define and Diagnose</a:t>
+            </a:r>
+          </a:p>
+        </p:txBody>
+      </p:sp>
+      <p:sp>
+        <p:nvSpPr>
+          <p:cNvPr id="3" name="Rectangle 2"/>
+          <p:cNvSpPr/>
+          <p:nvPr/>
+        </p:nvSpPr>
+        <p:spPr>
+          <a:xfrm>
+            <a:off x="777240" y="1417320"/>
+            <a:ext cx="1051560" cy="38100"/>
+          </a:xfrm>
+          <a:prstGeom prst="rect">
+            <a:avLst/>
+          </a:prstGeom>
+          <a:solidFill>
+            <a:srgbClr val="0F766E"/>
+          </a:solidFill>
+          <a:ln>
+            <a:noFill/>
+          </a:ln>
+          <a:effectLst/>
+        </p:spPr>
+        <p:style>
+          <a:lnRef idx="1">
+            <a:schemeClr val="accent1"/>
+          </a:lnRef>
+          <a:fillRef idx="3">
+            <a:schemeClr val="accent1"/>
+          </a:fillRef>
+          <a:effectRef idx="2">
+            <a:schemeClr val="accent1"/>
+          </a:effectRef>
+          <a:fontRef idx="minor">
+            <a:schemeClr val="lt1"/>
+          </a:fontRef>
+        </p:style>
+        <p:txBody>
+          <a:bodyPr rtlCol="0" anchor="ctr"/>
+          <a:lstStyle/>
+          <a:p>
+            <a:pPr algn="ctr"/>
+          </a:p>
+        </p:txBody>
+      </p:sp>
+      <p:sp>
+        <p:nvSpPr>
+          <p:cNvPr id="4" name="Rectangle 3"/>
+          <p:cNvSpPr/>
+          <p:nvPr/>
+        </p:nvSpPr>
+        <p:spPr>
+          <a:xfrm>
+            <a:off x="777240" y="1783080"/>
+            <a:ext cx="10637215" cy="4251960"/>
+          </a:xfrm>
+          <a:prstGeom prst="rect">
+            <a:avLst/>
+          </a:prstGeom>
+          <a:solidFill>
+            <a:srgbClr val="F1F5F9"/>
+          </a:solidFill>
+          <a:ln>
+            <a:noFill/>
+          </a:ln>
+          <a:effectLst/>
+        </p:spPr>
+        <p:style>
+          <a:lnRef idx="1">
+            <a:schemeClr val="accent1"/>
+          </a:lnRef>
+          <a:fillRef idx="3">
+            <a:schemeClr val="accent1"/>
+          </a:fillRef>
+          <a:effectRef idx="2">
+            <a:schemeClr val="accent1"/>
+          </a:effectRef>
+          <a:fontRef idx="minor">
+            <a:schemeClr val="lt1"/>
+          </a:fontRef>
+        </p:style>
+        <p:txBody>
+          <a:bodyPr rtlCol="0" anchor="ctr"/>
+          <a:lstStyle/>
+          <a:p>
+            <a:pPr algn="ctr"/>
+          </a:p>
+        </p:txBody>
+      </p:sp>
+      <p:sp>
+        <p:nvSpPr>
+          <p:cNvPr id="5" name="TextBox 4"/>
+          <p:cNvSpPr txBox="1"/>
+          <p:nvPr/>
+        </p:nvSpPr>
+        <p:spPr>
+          <a:xfrm>
+            <a:off x="1188720" y="2103120"/>
+            <a:ext cx="9814255" cy="3611880"/>
+          </a:xfrm>
+          <a:prstGeom prst="rect">
+            <a:avLst/>
+          </a:prstGeom>
+          <a:noFill/>
+        </p:spPr>
+        <p:txBody>
+          <a:bodyPr wrap="square" lIns="0" rIns="0" tIns="0" bIns="0">
+            <a:spAutoFit/>
+          </a:bodyPr>
+          <a:lstStyle/>
+          <a:p>
             <a:pPr>
+              <a:lnSpc>
+                <a:spcPct val="115000"/>
+              </a:lnSpc>
+              <a:spcAft>
+                <a:spcPts val="1000"/>
+              </a:spcAft>
+            </a:pPr>
+            <a:r>
+              <a:rPr sz="1900" b="1" i="0">
+                <a:solidFill>
+                  <a:srgbClr val="1F2937"/>
+                </a:solidFill>
+                <a:latin typeface="Calibri"/>
+              </a:rPr>
+              <a:t>•  The verification gap</a:t>
+            </a:r>
+          </a:p>
+          <a:p>
+            <a:pPr lvl="1">
+              <a:lnSpc>
+                <a:spcPct val="115000"/>
+              </a:lnSpc>
               <a:spcAft>
                 <a:spcPts val="500"/>
               </a:spcAft>
             </a:pPr>
             <a:r>
-              <a:rPr sz="1700" b="0" i="0">
-                <a:solidFill>
-                  <a:srgbClr val="FFFFFF"/>
+              <a:rPr sz="1600" b="0" i="0">
+                <a:solidFill>
+                  <a:srgbClr val="333D4B"/>
                 </a:solidFill>
                 <a:latin typeface="Calibri"/>
               </a:rPr>
-              <a:t>Mehmet Ali Akyol, PhD</a:t>
+              <a:t>—  Generating is fast, checking is slow, and the gap widens as output quality rises.</a:t>
             </a:r>
           </a:p>
           <a:p>
             <a:pPr>
+              <a:lnSpc>
+                <a:spcPct val="115000"/>
+              </a:lnSpc>
+              <a:spcAft>
+                <a:spcPts val="1000"/>
+              </a:spcAft>
+            </a:pPr>
+            <a:r>
+              <a:rPr sz="1900" b="1" i="0">
+                <a:solidFill>
+                  <a:srgbClr val="1F2937"/>
+                </a:solidFill>
+                <a:latin typeface="Calibri"/>
+              </a:rPr>
+              <a:t>•  Test set structure</a:t>
+            </a:r>
+          </a:p>
+          <a:p>
+            <a:pPr lvl="1">
+              <a:lnSpc>
+                <a:spcPct val="115000"/>
+              </a:lnSpc>
               <a:spcAft>
                 <a:spcPts val="500"/>
               </a:spcAft>
             </a:pPr>
             <a:r>
-              <a:rPr sz="1700" b="0" i="0">
-                <a:solidFill>
-                  <a:srgbClr val="C3D0DB"/>
+              <a:rPr sz="1600" b="0" i="0">
+                <a:solidFill>
+                  <a:srgbClr val="333D4B"/>
                 </a:solidFill>
                 <a:latin typeface="Calibri"/>
               </a:rPr>
-              <a:t>mehmetali.akyol@gmail.com</a:t>
+              <a:t>—  Seven answerable, graded easy/medium/hard, plus three plausible unanswerable ones. Expected answers written before running.</a:t>
+            </a:r>
+          </a:p>
+          <a:p>
+            <a:pPr>
+              <a:lnSpc>
+                <a:spcPct val="115000"/>
+              </a:lnSpc>
+              <a:spcAft>
+                <a:spcPts val="1000"/>
+              </a:spcAft>
+            </a:pPr>
+            <a:r>
+              <a:rPr sz="1900" b="1" i="0">
+                <a:solidFill>
+                  <a:srgbClr val="1F2937"/>
+                </a:solidFill>
+                <a:latin typeface="Calibri"/>
+              </a:rPr>
+              <a:t>•  Why the unanswerable questions matter most</a:t>
+            </a:r>
+          </a:p>
+          <a:p>
+            <a:pPr lvl="1">
+              <a:lnSpc>
+                <a:spcPct val="115000"/>
+              </a:lnSpc>
+              <a:spcAft>
+                <a:spcPts val="500"/>
+              </a:spcAft>
+            </a:pPr>
+            <a:r>
+              <a:rPr sz="1600" b="0" i="0">
+                <a:solidFill>
+                  <a:srgbClr val="333D4B"/>
+                </a:solidFill>
+                <a:latin typeface="Calibri"/>
+              </a:rPr>
+              <a:t>—  They test behaviour when the system does not know — the situation you cannot detect in normal use.</a:t>
+            </a:r>
+          </a:p>
+          <a:p>
+            <a:pPr>
+              <a:lnSpc>
+                <a:spcPct val="115000"/>
+              </a:lnSpc>
+              <a:spcAft>
+                <a:spcPts val="1000"/>
+              </a:spcAft>
+            </a:pPr>
+            <a:r>
+              <a:rPr sz="1900" b="1" i="0">
+                <a:solidFill>
+                  <a:srgbClr val="1F2937"/>
+                </a:solidFill>
+                <a:latin typeface="Calibri"/>
+              </a:rPr>
+              <a:t>•  Grading</a:t>
+            </a:r>
+          </a:p>
+          <a:p>
+            <a:pPr lvl="1">
+              <a:lnSpc>
+                <a:spcPct val="115000"/>
+              </a:lnSpc>
+              <a:spcAft>
+                <a:spcPts val="500"/>
+              </a:spcAft>
+            </a:pPr>
+            <a:r>
+              <a:rPr sz="1600" b="0" i="0">
+                <a:solidFill>
+                  <a:srgbClr val="333D4B"/>
+                </a:solidFill>
+                <a:latin typeface="Calibri"/>
+              </a:rPr>
+              <a:t>—  CORRECT · UNSUPPORTED · WRONG · REFUSED. Read the pattern, not the score.</a:t>
+            </a:r>
+          </a:p>
+          <a:p>
+            <a:pPr>
+              <a:lnSpc>
+                <a:spcPct val="115000"/>
+              </a:lnSpc>
+              <a:spcAft>
+                <a:spcPts val="1000"/>
+              </a:spcAft>
+            </a:pPr>
+            <a:r>
+              <a:rPr sz="1900" b="1" i="0">
+                <a:solidFill>
+                  <a:srgbClr val="1F2937"/>
+                </a:solidFill>
+                <a:latin typeface="Calibri"/>
+              </a:rPr>
+              <a:t>•  Consistency is not correctness</a:t>
+            </a:r>
+          </a:p>
+          <a:p>
+            <a:pPr lvl="1">
+              <a:lnSpc>
+                <a:spcPct val="115000"/>
+              </a:lnSpc>
+              <a:spcAft>
+                <a:spcPts val="500"/>
+              </a:spcAft>
+            </a:pPr>
+            <a:r>
+              <a:rPr sz="1600" b="0" i="0">
+                <a:solidFill>
+                  <a:srgbClr val="333D4B"/>
+                </a:solidFill>
+                <a:latin typeface="Calibri"/>
+              </a:rPr>
+              <a:t>—  Repeating a question measures how common the pattern is, not whether it is true. Verification needs something outside the system.</a:t>
+            </a:r>
+          </a:p>
+        </p:txBody>
+      </p:sp>
+      <p:sp>
+        <p:nvSpPr>
+          <p:cNvPr id="6" name="TextBox 5"/>
+          <p:cNvSpPr txBox="1"/>
+          <p:nvPr/>
+        </p:nvSpPr>
+        <p:spPr>
+          <a:xfrm>
+            <a:off x="777240" y="6355080"/>
+            <a:ext cx="10637215" cy="274320"/>
+          </a:xfrm>
+          <a:prstGeom prst="rect">
+            <a:avLst/>
+          </a:prstGeom>
+          <a:noFill/>
+        </p:spPr>
+        <p:txBody>
+          <a:bodyPr wrap="square" lIns="0" rIns="0" tIns="0" bIns="0">
+            <a:spAutoFit/>
+          </a:bodyPr>
+          <a:lstStyle/>
+          <a:p>
+            <a:r>
+              <a:rPr sz="1000" b="0" i="0">
+                <a:solidFill>
+                  <a:srgbClr val="6B7787"/>
+                </a:solidFill>
+                <a:latin typeface="Calibri"/>
+              </a:rPr>
+              <a:t>Week 8  ·  Prompt Engineering and Large Language Models</a:t>
+            </a:r>
+          </a:p>
+        </p:txBody>
+      </p:sp>
+      <p:sp>
+        <p:nvSpPr>
+          <p:cNvPr id="7" name="TextBox 6"/>
+          <p:cNvSpPr txBox="1"/>
+          <p:nvPr/>
+        </p:nvSpPr>
+        <p:spPr>
+          <a:xfrm>
+            <a:off x="10500055" y="6355080"/>
+            <a:ext cx="914400" cy="274320"/>
+          </a:xfrm>
+          <a:prstGeom prst="rect">
+            <a:avLst/>
+          </a:prstGeom>
+          <a:noFill/>
+        </p:spPr>
+        <p:txBody>
+          <a:bodyPr wrap="square" lIns="0" rIns="0" tIns="0" bIns="0">
+            <a:spAutoFit/>
+          </a:bodyPr>
+          <a:lstStyle/>
+          <a:p>
+            <a:pPr algn="r"/>
+            <a:r>
+              <a:rPr sz="1000" b="0" i="0">
+                <a:solidFill>
+                  <a:srgbClr val="6B7787"/>
+                </a:solidFill>
+                <a:latin typeface="Calibri"/>
+              </a:rPr>
+              <a:t>18</a:t>
+            </a:r>
+          </a:p>
+        </p:txBody>
+      </p:sp>
+    </p:spTree>
+  </p:cSld>
+  <p:clrMapOvr>
+    <a:masterClrMapping/>
+  </p:clrMapOvr>
+</p:sld>
+</file>
+
+<file path=ppt/slides/slide19.xml><?xml version="1.0" encoding="utf-8"?>
+<p:sld xmlns:a="http://schemas.openxmlformats.org/drawingml/2006/main" xmlns:p="http://schemas.openxmlformats.org/presentationml/2006/main" xmlns:r="http://schemas.openxmlformats.org/officeDocument/2006/relationships">
+  <p:cSld>
+    <p:spTree>
+      <p:nvGrpSpPr>
+        <p:cNvPr id="1" name=""/>
+        <p:cNvGrpSpPr/>
+        <p:nvPr/>
+      </p:nvGrpSpPr>
+      <p:grpSpPr/>
+      <p:sp>
+        <p:nvSpPr>
+          <p:cNvPr id="2" name="TextBox 1"/>
+          <p:cNvSpPr txBox="1"/>
+          <p:nvPr/>
+        </p:nvSpPr>
+        <p:spPr>
+          <a:xfrm>
+            <a:off x="777240" y="566928"/>
+            <a:ext cx="10637215" cy="822960"/>
+          </a:xfrm>
+          <a:prstGeom prst="rect">
+            <a:avLst/>
+          </a:prstGeom>
+          <a:noFill/>
+        </p:spPr>
+        <p:txBody>
+          <a:bodyPr wrap="square" lIns="0" rIns="0" tIns="0" bIns="0">
+            <a:spAutoFit/>
+          </a:bodyPr>
+          <a:lstStyle/>
+          <a:p>
+            <a:r>
+              <a:rPr sz="3000" b="1" i="0">
+                <a:solidFill>
+                  <a:srgbClr val="1F2937"/>
+                </a:solidFill>
+                <a:latin typeface="Calibri Light"/>
+              </a:rPr>
+              <a:t>Wrap-Up</a:t>
+            </a:r>
+          </a:p>
+        </p:txBody>
+      </p:sp>
+      <p:sp>
+        <p:nvSpPr>
+          <p:cNvPr id="3" name="Rectangle 2"/>
+          <p:cNvSpPr/>
+          <p:nvPr/>
+        </p:nvSpPr>
+        <p:spPr>
+          <a:xfrm>
+            <a:off x="777240" y="1417320"/>
+            <a:ext cx="1051560" cy="38100"/>
+          </a:xfrm>
+          <a:prstGeom prst="rect">
+            <a:avLst/>
+          </a:prstGeom>
+          <a:solidFill>
+            <a:srgbClr val="0F766E"/>
+          </a:solidFill>
+          <a:ln>
+            <a:noFill/>
+          </a:ln>
+          <a:effectLst/>
+        </p:spPr>
+        <p:style>
+          <a:lnRef idx="1">
+            <a:schemeClr val="accent1"/>
+          </a:lnRef>
+          <a:fillRef idx="3">
+            <a:schemeClr val="accent1"/>
+          </a:fillRef>
+          <a:effectRef idx="2">
+            <a:schemeClr val="accent1"/>
+          </a:effectRef>
+          <a:fontRef idx="minor">
+            <a:schemeClr val="lt1"/>
+          </a:fontRef>
+        </p:style>
+        <p:txBody>
+          <a:bodyPr rtlCol="0" anchor="ctr"/>
+          <a:lstStyle/>
+          <a:p>
+            <a:pPr algn="ctr"/>
+          </a:p>
+        </p:txBody>
+      </p:sp>
+      <p:sp>
+        <p:nvSpPr>
+          <p:cNvPr id="4" name="TextBox 3"/>
+          <p:cNvSpPr txBox="1"/>
+          <p:nvPr/>
+        </p:nvSpPr>
+        <p:spPr>
+          <a:xfrm>
+            <a:off x="777240" y="1783080"/>
+            <a:ext cx="10637215" cy="4343400"/>
+          </a:xfrm>
+          <a:prstGeom prst="rect">
+            <a:avLst/>
+          </a:prstGeom>
+          <a:noFill/>
+        </p:spPr>
+        <p:txBody>
+          <a:bodyPr wrap="square" lIns="0" rIns="0" tIns="0" bIns="0">
+            <a:spAutoFit/>
+          </a:bodyPr>
+          <a:lstStyle/>
+          <a:p>
+            <a:pPr>
+              <a:lnSpc>
+                <a:spcPct val="115000"/>
+              </a:lnSpc>
+              <a:spcAft>
+                <a:spcPts val="1000"/>
+              </a:spcAft>
+            </a:pPr>
+            <a:r>
+              <a:rPr sz="1900" b="0" i="0">
+                <a:solidFill>
+                  <a:srgbClr val="1F2937"/>
+                </a:solidFill>
+                <a:latin typeface="Calibri"/>
+              </a:rPr>
+              <a:t>•  Generating is fast; checking is slow; the gap grows as quality rises</a:t>
+            </a:r>
+          </a:p>
+          <a:p>
+            <a:pPr>
+              <a:lnSpc>
+                <a:spcPct val="115000"/>
+              </a:lnSpc>
+              <a:spcAft>
+                <a:spcPts val="1000"/>
+              </a:spcAft>
+            </a:pPr>
+            <a:r>
+              <a:rPr sz="1900" b="0" i="0">
+                <a:solidFill>
+                  <a:srgbClr val="1F2937"/>
+                </a:solidFill>
+                <a:latin typeface="Calibri"/>
+              </a:rPr>
+              <a:t>•  Test the system once, deliberately, instead of hoping to catch errors forever</a:t>
+            </a:r>
+          </a:p>
+          <a:p>
+            <a:pPr>
+              <a:lnSpc>
+                <a:spcPct val="115000"/>
+              </a:lnSpc>
+              <a:spcAft>
+                <a:spcPts val="1000"/>
+              </a:spcAft>
+            </a:pPr>
+            <a:r>
+              <a:rPr sz="1900" b="1" i="0">
+                <a:solidFill>
+                  <a:srgbClr val="1F2937"/>
+                </a:solidFill>
+                <a:latin typeface="Calibri"/>
+              </a:rPr>
+              <a:t>•  Three unanswerable questions tell you more than seven answerable ones</a:t>
+            </a:r>
+          </a:p>
+          <a:p>
+            <a:pPr>
+              <a:lnSpc>
+                <a:spcPct val="115000"/>
+              </a:lnSpc>
+              <a:spcAft>
+                <a:spcPts val="1000"/>
+              </a:spcAft>
+            </a:pPr>
+            <a:r>
+              <a:rPr sz="1900" b="0" i="0">
+                <a:solidFill>
+                  <a:srgbClr val="1F2937"/>
+                </a:solidFill>
+                <a:latin typeface="Calibri"/>
+              </a:rPr>
+              <a:t>•  Grade the pattern, not the score</a:t>
+            </a:r>
+          </a:p>
+          <a:p>
+            <a:pPr>
+              <a:lnSpc>
+                <a:spcPct val="115000"/>
+              </a:lnSpc>
+              <a:spcAft>
+                <a:spcPts val="1000"/>
+              </a:spcAft>
+            </a:pPr>
+            <a:r>
+              <a:rPr sz="1900" b="0" i="0">
+                <a:solidFill>
+                  <a:srgbClr val="1F2937"/>
+                </a:solidFill>
+                <a:latin typeface="Calibri"/>
+              </a:rPr>
+              <a:t>•  Asking twice is not checking — verification needs something outside the system</a:t>
+            </a:r>
+          </a:p>
+          <a:p>
+            <a:pPr>
+              <a:lnSpc>
+                <a:spcPct val="115000"/>
+              </a:lnSpc>
+              <a:spcAft>
+                <a:spcPts val="1000"/>
+              </a:spcAft>
+            </a:pPr>
+          </a:p>
+          <a:p>
+            <a:pPr>
+              <a:lnSpc>
+                <a:spcPct val="115000"/>
+              </a:lnSpc>
+              <a:spcAft>
+                <a:spcPts val="1000"/>
+              </a:spcAft>
+            </a:pPr>
+            <a:r>
+              <a:rPr sz="1900" b="1" i="0">
+                <a:solidFill>
+                  <a:srgbClr val="1F2937"/>
+                </a:solidFill>
+                <a:latin typeface="Calibri"/>
+              </a:rPr>
+              <a:t>•  Next week:</a:t>
+            </a:r>
+          </a:p>
+          <a:p>
+            <a:pPr lvl="1">
+              <a:lnSpc>
+                <a:spcPct val="115000"/>
+              </a:lnSpc>
+              <a:spcAft>
+                <a:spcPts val="500"/>
+              </a:spcAft>
+            </a:pPr>
+            <a:r>
+              <a:rPr sz="1600" b="0" i="0">
+                <a:solidFill>
+                  <a:srgbClr val="333D4B"/>
+                </a:solidFill>
+                <a:latin typeface="Calibri"/>
+              </a:rPr>
+              <a:t>—  AI Agents and Workflow Automation — what happens when it acts without you watching</a:t>
+            </a:r>
+          </a:p>
+        </p:txBody>
+      </p:sp>
+      <p:sp>
+        <p:nvSpPr>
+          <p:cNvPr id="5" name="TextBox 4"/>
+          <p:cNvSpPr txBox="1"/>
+          <p:nvPr/>
+        </p:nvSpPr>
+        <p:spPr>
+          <a:xfrm>
+            <a:off x="777240" y="6355080"/>
+            <a:ext cx="10637215" cy="274320"/>
+          </a:xfrm>
+          <a:prstGeom prst="rect">
+            <a:avLst/>
+          </a:prstGeom>
+          <a:noFill/>
+        </p:spPr>
+        <p:txBody>
+          <a:bodyPr wrap="square" lIns="0" rIns="0" tIns="0" bIns="0">
+            <a:spAutoFit/>
+          </a:bodyPr>
+          <a:lstStyle/>
+          <a:p>
+            <a:r>
+              <a:rPr sz="1000" b="0" i="0">
+                <a:solidFill>
+                  <a:srgbClr val="6B7787"/>
+                </a:solidFill>
+                <a:latin typeface="Calibri"/>
+              </a:rPr>
+              <a:t>Week 8  ·  Prompt Engineering and Large Language Models</a:t>
+            </a:r>
+          </a:p>
+        </p:txBody>
+      </p:sp>
+      <p:sp>
+        <p:nvSpPr>
+          <p:cNvPr id="6" name="TextBox 5"/>
+          <p:cNvSpPr txBox="1"/>
+          <p:nvPr/>
+        </p:nvSpPr>
+        <p:spPr>
+          <a:xfrm>
+            <a:off x="10500055" y="6355080"/>
+            <a:ext cx="914400" cy="274320"/>
+          </a:xfrm>
+          <a:prstGeom prst="rect">
+            <a:avLst/>
+          </a:prstGeom>
+          <a:noFill/>
+        </p:spPr>
+        <p:txBody>
+          <a:bodyPr wrap="square" lIns="0" rIns="0" tIns="0" bIns="0">
+            <a:spAutoFit/>
+          </a:bodyPr>
+          <a:lstStyle/>
+          <a:p>
+            <a:pPr algn="r"/>
+            <a:r>
+              <a:rPr sz="1000" b="0" i="0">
+                <a:solidFill>
+                  <a:srgbClr val="6B7787"/>
+                </a:solidFill>
+                <a:latin typeface="Calibri"/>
+              </a:rPr>
+              <a:t>19</a:t>
             </a:r>
           </a:p>
         </p:txBody>
@@ -9000,6 +10986,201 @@
                 <a:latin typeface="Calibri"/>
               </a:rPr>
               <a:t>2</a:t>
+            </a:r>
+          </a:p>
+        </p:txBody>
+      </p:sp>
+    </p:spTree>
+  </p:cSld>
+  <p:clrMapOvr>
+    <a:masterClrMapping/>
+  </p:clrMapOvr>
+</p:sld>
+</file>
+
+<file path=ppt/slides/slide20.xml><?xml version="1.0" encoding="utf-8"?>
+<p:sld xmlns:a="http://schemas.openxmlformats.org/drawingml/2006/main" xmlns:p="http://schemas.openxmlformats.org/presentationml/2006/main" xmlns:r="http://schemas.openxmlformats.org/officeDocument/2006/relationships">
+  <p:cSld>
+    <p:spTree>
+      <p:nvGrpSpPr>
+        <p:cNvPr id="1" name=""/>
+        <p:cNvGrpSpPr/>
+        <p:nvPr/>
+      </p:nvGrpSpPr>
+      <p:grpSpPr/>
+      <p:sp>
+        <p:nvSpPr>
+          <p:cNvPr id="2" name="Rectangle 1"/>
+          <p:cNvSpPr/>
+          <p:nvPr/>
+        </p:nvSpPr>
+        <p:spPr>
+          <a:xfrm>
+            <a:off x="0" y="0"/>
+            <a:ext cx="12191695" cy="6858000"/>
+          </a:xfrm>
+          <a:prstGeom prst="rect">
+            <a:avLst/>
+          </a:prstGeom>
+          <a:solidFill>
+            <a:srgbClr val="1F2937"/>
+          </a:solidFill>
+          <a:ln>
+            <a:noFill/>
+          </a:ln>
+          <a:effectLst/>
+        </p:spPr>
+        <p:style>
+          <a:lnRef idx="1">
+            <a:schemeClr val="accent1"/>
+          </a:lnRef>
+          <a:fillRef idx="3">
+            <a:schemeClr val="accent1"/>
+          </a:fillRef>
+          <a:effectRef idx="2">
+            <a:schemeClr val="accent1"/>
+          </a:effectRef>
+          <a:fontRef idx="minor">
+            <a:schemeClr val="lt1"/>
+          </a:fontRef>
+        </p:style>
+        <p:txBody>
+          <a:bodyPr rtlCol="0" anchor="ctr"/>
+          <a:lstStyle/>
+          <a:p>
+            <a:pPr algn="ctr"/>
+          </a:p>
+        </p:txBody>
+      </p:sp>
+      <p:sp>
+        <p:nvSpPr>
+          <p:cNvPr id="3" name="TextBox 2"/>
+          <p:cNvSpPr txBox="1"/>
+          <p:nvPr/>
+        </p:nvSpPr>
+        <p:spPr>
+          <a:xfrm>
+            <a:off x="777240" y="2468880"/>
+            <a:ext cx="10241280" cy="914400"/>
+          </a:xfrm>
+          <a:prstGeom prst="rect">
+            <a:avLst/>
+          </a:prstGeom>
+          <a:noFill/>
+        </p:spPr>
+        <p:txBody>
+          <a:bodyPr wrap="square" lIns="0" rIns="0" tIns="0" bIns="0">
+            <a:spAutoFit/>
+          </a:bodyPr>
+          <a:lstStyle/>
+          <a:p>
+            <a:r>
+              <a:rPr sz="4400" b="1" i="0">
+                <a:solidFill>
+                  <a:srgbClr val="FFFFFF"/>
+                </a:solidFill>
+                <a:latin typeface="Calibri Light"/>
+              </a:rPr>
+              <a:t>Questions?</a:t>
+            </a:r>
+          </a:p>
+        </p:txBody>
+      </p:sp>
+      <p:sp>
+        <p:nvSpPr>
+          <p:cNvPr id="4" name="Rectangle 3"/>
+          <p:cNvSpPr/>
+          <p:nvPr/>
+        </p:nvSpPr>
+        <p:spPr>
+          <a:xfrm>
+            <a:off x="777240" y="3566160"/>
+            <a:ext cx="1051560" cy="50800"/>
+          </a:xfrm>
+          <a:prstGeom prst="rect">
+            <a:avLst/>
+          </a:prstGeom>
+          <a:solidFill>
+            <a:srgbClr val="0F766E"/>
+          </a:solidFill>
+          <a:ln>
+            <a:noFill/>
+          </a:ln>
+          <a:effectLst/>
+        </p:spPr>
+        <p:style>
+          <a:lnRef idx="1">
+            <a:schemeClr val="accent1"/>
+          </a:lnRef>
+          <a:fillRef idx="3">
+            <a:schemeClr val="accent1"/>
+          </a:fillRef>
+          <a:effectRef idx="2">
+            <a:schemeClr val="accent1"/>
+          </a:effectRef>
+          <a:fontRef idx="minor">
+            <a:schemeClr val="lt1"/>
+          </a:fontRef>
+        </p:style>
+        <p:txBody>
+          <a:bodyPr rtlCol="0" anchor="ctr"/>
+          <a:lstStyle/>
+          <a:p>
+            <a:pPr algn="ctr"/>
+          </a:p>
+        </p:txBody>
+      </p:sp>
+      <p:sp>
+        <p:nvSpPr>
+          <p:cNvPr id="5" name="TextBox 4"/>
+          <p:cNvSpPr txBox="1"/>
+          <p:nvPr/>
+        </p:nvSpPr>
+        <p:spPr>
+          <a:xfrm>
+            <a:off x="777240" y="3931920"/>
+            <a:ext cx="10241280" cy="914400"/>
+          </a:xfrm>
+          <a:prstGeom prst="rect">
+            <a:avLst/>
+          </a:prstGeom>
+          <a:noFill/>
+        </p:spPr>
+        <p:txBody>
+          <a:bodyPr wrap="square" lIns="0" rIns="0" tIns="0" bIns="0">
+            <a:spAutoFit/>
+          </a:bodyPr>
+          <a:lstStyle/>
+          <a:p>
+            <a:pPr>
+              <a:spcAft>
+                <a:spcPts val="500"/>
+              </a:spcAft>
+            </a:pPr>
+            <a:r>
+              <a:rPr sz="1700" b="0" i="0">
+                <a:solidFill>
+                  <a:srgbClr val="FFFFFF"/>
+                </a:solidFill>
+                <a:latin typeface="Calibri"/>
+              </a:rPr>
+              <a:t>Mehmet Ali Akyol, PhD</a:t>
+            </a:r>
+          </a:p>
+          <a:p>
+            <a:pPr>
+              <a:spcAft>
+                <a:spcPts val="500"/>
+              </a:spcAft>
+            </a:pPr>
+            <a:r>
+              <a:rPr sz="1700" b="0" i="0">
+                <a:solidFill>
+                  <a:srgbClr val="C3D0DB"/>
+                </a:solidFill>
+                <a:latin typeface="Calibri"/>
+              </a:rPr>
+              <a:t>mehmetali.akyol@gmail.com</a:t>
             </a:r>
           </a:p>
         </p:txBody>
